--- a/junk/stage.pptx
+++ b/junk/stage.pptx
@@ -8,6 +8,7 @@
     <p:sldId id="256" r:id="rId2"/>
     <p:sldId id="257" r:id="rId3"/>
     <p:sldId id="258" r:id="rId4"/>
+    <p:sldId id="259" r:id="rId5"/>
   </p:sldIdLst>
   <p:sldSz cx="12192000" cy="6858000"/>
   <p:notesSz cx="6858000" cy="9144000"/>
@@ -261,7 +262,7 @@
           <a:p>
             <a:fld id="{37207A8B-0000-4D20-A8A7-3FE7CFF1FD16}" type="datetimeFigureOut">
               <a:rPr lang="ko-KR" altLang="en-US" smtClean="0"/>
-              <a:t>2024-08-18</a:t>
+              <a:t>2025-05-11</a:t>
             </a:fld>
             <a:endParaRPr lang="ko-KR" altLang="en-US"/>
           </a:p>
@@ -459,7 +460,7 @@
           <a:p>
             <a:fld id="{37207A8B-0000-4D20-A8A7-3FE7CFF1FD16}" type="datetimeFigureOut">
               <a:rPr lang="ko-KR" altLang="en-US" smtClean="0"/>
-              <a:t>2024-08-18</a:t>
+              <a:t>2025-05-11</a:t>
             </a:fld>
             <a:endParaRPr lang="ko-KR" altLang="en-US"/>
           </a:p>
@@ -667,7 +668,7 @@
           <a:p>
             <a:fld id="{37207A8B-0000-4D20-A8A7-3FE7CFF1FD16}" type="datetimeFigureOut">
               <a:rPr lang="ko-KR" altLang="en-US" smtClean="0"/>
-              <a:t>2024-08-18</a:t>
+              <a:t>2025-05-11</a:t>
             </a:fld>
             <a:endParaRPr lang="ko-KR" altLang="en-US"/>
           </a:p>
@@ -865,7 +866,7 @@
           <a:p>
             <a:fld id="{37207A8B-0000-4D20-A8A7-3FE7CFF1FD16}" type="datetimeFigureOut">
               <a:rPr lang="ko-KR" altLang="en-US" smtClean="0"/>
-              <a:t>2024-08-18</a:t>
+              <a:t>2025-05-11</a:t>
             </a:fld>
             <a:endParaRPr lang="ko-KR" altLang="en-US"/>
           </a:p>
@@ -1140,7 +1141,7 @@
           <a:p>
             <a:fld id="{37207A8B-0000-4D20-A8A7-3FE7CFF1FD16}" type="datetimeFigureOut">
               <a:rPr lang="ko-KR" altLang="en-US" smtClean="0"/>
-              <a:t>2024-08-18</a:t>
+              <a:t>2025-05-11</a:t>
             </a:fld>
             <a:endParaRPr lang="ko-KR" altLang="en-US"/>
           </a:p>
@@ -1405,7 +1406,7 @@
           <a:p>
             <a:fld id="{37207A8B-0000-4D20-A8A7-3FE7CFF1FD16}" type="datetimeFigureOut">
               <a:rPr lang="ko-KR" altLang="en-US" smtClean="0"/>
-              <a:t>2024-08-18</a:t>
+              <a:t>2025-05-11</a:t>
             </a:fld>
             <a:endParaRPr lang="ko-KR" altLang="en-US"/>
           </a:p>
@@ -1817,7 +1818,7 @@
           <a:p>
             <a:fld id="{37207A8B-0000-4D20-A8A7-3FE7CFF1FD16}" type="datetimeFigureOut">
               <a:rPr lang="ko-KR" altLang="en-US" smtClean="0"/>
-              <a:t>2024-08-18</a:t>
+              <a:t>2025-05-11</a:t>
             </a:fld>
             <a:endParaRPr lang="ko-KR" altLang="en-US"/>
           </a:p>
@@ -1958,7 +1959,7 @@
           <a:p>
             <a:fld id="{37207A8B-0000-4D20-A8A7-3FE7CFF1FD16}" type="datetimeFigureOut">
               <a:rPr lang="ko-KR" altLang="en-US" smtClean="0"/>
-              <a:t>2024-08-18</a:t>
+              <a:t>2025-05-11</a:t>
             </a:fld>
             <a:endParaRPr lang="ko-KR" altLang="en-US"/>
           </a:p>
@@ -2071,7 +2072,7 @@
           <a:p>
             <a:fld id="{37207A8B-0000-4D20-A8A7-3FE7CFF1FD16}" type="datetimeFigureOut">
               <a:rPr lang="ko-KR" altLang="en-US" smtClean="0"/>
-              <a:t>2024-08-18</a:t>
+              <a:t>2025-05-11</a:t>
             </a:fld>
             <a:endParaRPr lang="ko-KR" altLang="en-US"/>
           </a:p>
@@ -2382,7 +2383,7 @@
           <a:p>
             <a:fld id="{37207A8B-0000-4D20-A8A7-3FE7CFF1FD16}" type="datetimeFigureOut">
               <a:rPr lang="ko-KR" altLang="en-US" smtClean="0"/>
-              <a:t>2024-08-18</a:t>
+              <a:t>2025-05-11</a:t>
             </a:fld>
             <a:endParaRPr lang="ko-KR" altLang="en-US"/>
           </a:p>
@@ -2670,7 +2671,7 @@
           <a:p>
             <a:fld id="{37207A8B-0000-4D20-A8A7-3FE7CFF1FD16}" type="datetimeFigureOut">
               <a:rPr lang="ko-KR" altLang="en-US" smtClean="0"/>
-              <a:t>2024-08-18</a:t>
+              <a:t>2025-05-11</a:t>
             </a:fld>
             <a:endParaRPr lang="ko-KR" altLang="en-US"/>
           </a:p>
@@ -2911,7 +2912,7 @@
           <a:p>
             <a:fld id="{37207A8B-0000-4D20-A8A7-3FE7CFF1FD16}" type="datetimeFigureOut">
               <a:rPr lang="ko-KR" altLang="en-US" smtClean="0"/>
-              <a:t>2024-08-18</a:t>
+              <a:t>2025-05-11</a:t>
             </a:fld>
             <a:endParaRPr lang="ko-KR" altLang="en-US"/>
           </a:p>
@@ -8823,7 +8824,7 @@
                     <a:lstStyle/>
                     <a:p>
                       <a:pPr latinLnBrk="1"/>
-                      <a:endParaRPr lang="ko-KR" altLang="en-US" sz="500"/>
+                      <a:endParaRPr lang="ko-KR" altLang="en-US" sz="500" dirty="0"/>
                     </a:p>
                   </a:txBody>
                   <a:tcPr>
@@ -20116,6 +20117,390 @@
 </p:sld>
 </file>
 
+<file path=ppt/slides/slide4.xml><?xml version="1.0" encoding="utf-8"?>
+<p:sld xmlns:a="http://schemas.openxmlformats.org/drawingml/2006/main" xmlns:r="http://schemas.openxmlformats.org/officeDocument/2006/relationships" xmlns:p="http://schemas.openxmlformats.org/presentationml/2006/main">
+  <p:cSld>
+    <p:bg>
+      <p:bgPr>
+        <a:solidFill>
+          <a:schemeClr val="tx1"/>
+        </a:solidFill>
+        <a:effectLst/>
+      </p:bgPr>
+    </p:bg>
+    <p:spTree>
+      <p:nvGrpSpPr>
+        <p:cNvPr id="1" name=""/>
+        <p:cNvGrpSpPr/>
+        <p:nvPr/>
+      </p:nvGrpSpPr>
+      <p:grpSpPr>
+        <a:xfrm>
+          <a:off x="0" y="0"/>
+          <a:ext cx="0" cy="0"/>
+          <a:chOff x="0" y="0"/>
+          <a:chExt cx="0" cy="0"/>
+        </a:xfrm>
+      </p:grpSpPr>
+      <p:pic>
+        <p:nvPicPr>
+          <p:cNvPr id="6" name="그림 5">
+            <a:extLst>
+              <a:ext uri="{FF2B5EF4-FFF2-40B4-BE49-F238E27FC236}">
+                <a16:creationId xmlns:a16="http://schemas.microsoft.com/office/drawing/2014/main" id="{2E06CA2A-5441-C3C0-5BF5-CA717582DF93}"/>
+              </a:ext>
+            </a:extLst>
+          </p:cNvPr>
+          <p:cNvPicPr>
+            <a:picLocks noChangeAspect="1"/>
+          </p:cNvPicPr>
+          <p:nvPr/>
+        </p:nvPicPr>
+        <p:blipFill>
+          <a:blip r:embed="rId2">
+            <a:extLst>
+              <a:ext uri="{BEBA8EAE-BF5A-486C-A8C5-ECC9F3942E4B}">
+                <a14:imgProps xmlns:a14="http://schemas.microsoft.com/office/drawing/2010/main">
+                  <a14:imgLayer r:embed="rId3">
+                    <a14:imgEffect>
+                      <a14:brightnessContrast bright="100000"/>
+                    </a14:imgEffect>
+                  </a14:imgLayer>
+                </a14:imgProps>
+              </a:ext>
+            </a:extLst>
+          </a:blip>
+          <a:stretch>
+            <a:fillRect/>
+          </a:stretch>
+        </p:blipFill>
+        <p:spPr>
+          <a:xfrm>
+            <a:off x="5887222" y="2288443"/>
+            <a:ext cx="2009869" cy="2009869"/>
+          </a:xfrm>
+          <a:prstGeom prst="rect">
+            <a:avLst/>
+          </a:prstGeom>
+        </p:spPr>
+      </p:pic>
+      <p:pic>
+        <p:nvPicPr>
+          <p:cNvPr id="1028" name="Picture 4" descr="부활초 | 포켓몬 위키 | Fandom">
+            <a:extLst>
+              <a:ext uri="{FF2B5EF4-FFF2-40B4-BE49-F238E27FC236}">
+                <a16:creationId xmlns:a16="http://schemas.microsoft.com/office/drawing/2014/main" id="{7B29D5C5-EB88-13C6-6B2C-4F80F320AB3F}"/>
+              </a:ext>
+            </a:extLst>
+          </p:cNvPr>
+          <p:cNvPicPr>
+            <a:picLocks noChangeAspect="1" noChangeArrowheads="1"/>
+          </p:cNvPicPr>
+          <p:nvPr/>
+        </p:nvPicPr>
+        <p:blipFill>
+          <a:blip r:embed="rId4">
+            <a:extLst>
+              <a:ext uri="{BEBA8EAE-BF5A-486C-A8C5-ECC9F3942E4B}">
+                <a14:imgProps xmlns:a14="http://schemas.microsoft.com/office/drawing/2010/main">
+                  <a14:imgLayer r:embed="rId5">
+                    <a14:imgEffect>
+                      <a14:brightnessContrast bright="100000"/>
+                    </a14:imgEffect>
+                  </a14:imgLayer>
+                </a14:imgProps>
+              </a:ext>
+              <a:ext uri="{28A0092B-C50C-407E-A947-70E740481C1C}">
+                <a14:useLocalDpi xmlns:a14="http://schemas.microsoft.com/office/drawing/2010/main" val="0"/>
+              </a:ext>
+            </a:extLst>
+          </a:blip>
+          <a:srcRect/>
+          <a:stretch>
+            <a:fillRect/>
+          </a:stretch>
+        </p:blipFill>
+        <p:spPr bwMode="auto">
+          <a:xfrm>
+            <a:off x="3301998" y="1159297"/>
+            <a:ext cx="2258291" cy="2258291"/>
+          </a:xfrm>
+          <a:prstGeom prst="rect">
+            <a:avLst/>
+          </a:prstGeom>
+          <a:noFill/>
+          <a:extLst>
+            <a:ext uri="{909E8E84-426E-40DD-AFC4-6F175D3DCCD1}">
+              <a14:hiddenFill xmlns:a14="http://schemas.microsoft.com/office/drawing/2010/main">
+                <a:solidFill>
+                  <a:srgbClr val="FFFFFF"/>
+                </a:solidFill>
+              </a14:hiddenFill>
+            </a:ext>
+          </a:extLst>
+        </p:spPr>
+      </p:pic>
+      <p:pic>
+        <p:nvPicPr>
+          <p:cNvPr id="5" name="그림 4">
+            <a:extLst>
+              <a:ext uri="{FF2B5EF4-FFF2-40B4-BE49-F238E27FC236}">
+                <a16:creationId xmlns:a16="http://schemas.microsoft.com/office/drawing/2014/main" id="{19F564DF-CF68-F267-ACA0-EAE700DF5423}"/>
+              </a:ext>
+            </a:extLst>
+          </p:cNvPr>
+          <p:cNvPicPr>
+            <a:picLocks noChangeAspect="1"/>
+          </p:cNvPicPr>
+          <p:nvPr/>
+        </p:nvPicPr>
+        <p:blipFill>
+          <a:blip r:embed="rId6">
+            <a:extLst>
+              <a:ext uri="{BEBA8EAE-BF5A-486C-A8C5-ECC9F3942E4B}">
+                <a14:imgProps xmlns:a14="http://schemas.microsoft.com/office/drawing/2010/main">
+                  <a14:imgLayer r:embed="rId7">
+                    <a14:imgEffect>
+                      <a14:brightnessContrast bright="100000"/>
+                    </a14:imgEffect>
+                  </a14:imgLayer>
+                </a14:imgProps>
+              </a:ext>
+            </a:extLst>
+          </a:blip>
+          <a:srcRect l="9015" r="2529" b="47922"/>
+          <a:stretch/>
+        </p:blipFill>
+        <p:spPr>
+          <a:xfrm>
+            <a:off x="2456873" y="3636685"/>
+            <a:ext cx="1823985" cy="1073860"/>
+          </a:xfrm>
+          <a:prstGeom prst="rect">
+            <a:avLst/>
+          </a:prstGeom>
+        </p:spPr>
+      </p:pic>
+      <p:grpSp>
+        <p:nvGrpSpPr>
+          <p:cNvPr id="12" name="그룹 11">
+            <a:extLst>
+              <a:ext uri="{FF2B5EF4-FFF2-40B4-BE49-F238E27FC236}">
+                <a16:creationId xmlns:a16="http://schemas.microsoft.com/office/drawing/2014/main" id="{C4B19478-8E4D-0DF0-3CA4-309C15BE3477}"/>
+              </a:ext>
+            </a:extLst>
+          </p:cNvPr>
+          <p:cNvGrpSpPr/>
+          <p:nvPr/>
+        </p:nvGrpSpPr>
+        <p:grpSpPr>
+          <a:xfrm>
+            <a:off x="8942044" y="1404371"/>
+            <a:ext cx="1253658" cy="1734842"/>
+            <a:chOff x="8942044" y="1404371"/>
+            <a:chExt cx="1253658" cy="1734842"/>
+          </a:xfrm>
+        </p:grpSpPr>
+        <p:pic>
+          <p:nvPicPr>
+            <p:cNvPr id="8" name="그림 7">
+              <a:extLst>
+                <a:ext uri="{FF2B5EF4-FFF2-40B4-BE49-F238E27FC236}">
+                  <a16:creationId xmlns:a16="http://schemas.microsoft.com/office/drawing/2014/main" id="{67E70571-A187-3A0B-27B5-E5F0B4EC41BA}"/>
+                </a:ext>
+              </a:extLst>
+            </p:cNvPr>
+            <p:cNvPicPr>
+              <a:picLocks noChangeAspect="1"/>
+            </p:cNvPicPr>
+            <p:nvPr/>
+          </p:nvPicPr>
+          <p:blipFill>
+            <a:blip r:embed="rId8">
+              <a:extLst>
+                <a:ext uri="{28A0092B-C50C-407E-A947-70E740481C1C}">
+                  <a14:useLocalDpi xmlns:a14="http://schemas.microsoft.com/office/drawing/2010/main" val="0"/>
+                </a:ext>
+              </a:extLst>
+            </a:blip>
+            <a:stretch>
+              <a:fillRect/>
+            </a:stretch>
+          </p:blipFill>
+          <p:spPr>
+            <a:xfrm>
+              <a:off x="8942044" y="1404371"/>
+              <a:ext cx="626829" cy="718841"/>
+            </a:xfrm>
+            <a:prstGeom prst="rect">
+              <a:avLst/>
+            </a:prstGeom>
+          </p:spPr>
+        </p:pic>
+        <p:pic>
+          <p:nvPicPr>
+            <p:cNvPr id="9" name="그림 8">
+              <a:extLst>
+                <a:ext uri="{FF2B5EF4-FFF2-40B4-BE49-F238E27FC236}">
+                  <a16:creationId xmlns:a16="http://schemas.microsoft.com/office/drawing/2014/main" id="{43175910-21FA-B037-B06A-7800829CD90F}"/>
+                </a:ext>
+              </a:extLst>
+            </p:cNvPr>
+            <p:cNvPicPr>
+              <a:picLocks noChangeAspect="1"/>
+            </p:cNvPicPr>
+            <p:nvPr/>
+          </p:nvPicPr>
+          <p:blipFill>
+            <a:blip r:embed="rId8">
+              <a:extLst>
+                <a:ext uri="{28A0092B-C50C-407E-A947-70E740481C1C}">
+                  <a14:useLocalDpi xmlns:a14="http://schemas.microsoft.com/office/drawing/2010/main" val="0"/>
+                </a:ext>
+              </a:extLst>
+            </a:blip>
+            <a:stretch>
+              <a:fillRect/>
+            </a:stretch>
+          </p:blipFill>
+          <p:spPr>
+            <a:xfrm>
+              <a:off x="9810264" y="1763792"/>
+              <a:ext cx="313414" cy="359420"/>
+            </a:xfrm>
+            <a:prstGeom prst="rect">
+              <a:avLst/>
+            </a:prstGeom>
+          </p:spPr>
+        </p:pic>
+        <p:pic>
+          <p:nvPicPr>
+            <p:cNvPr id="10" name="그림 9">
+              <a:extLst>
+                <a:ext uri="{FF2B5EF4-FFF2-40B4-BE49-F238E27FC236}">
+                  <a16:creationId xmlns:a16="http://schemas.microsoft.com/office/drawing/2014/main" id="{E5678186-30E2-9D42-3FCD-EE0B77C530FB}"/>
+                </a:ext>
+              </a:extLst>
+            </p:cNvPr>
+            <p:cNvPicPr>
+              <a:picLocks noChangeAspect="1"/>
+            </p:cNvPicPr>
+            <p:nvPr/>
+          </p:nvPicPr>
+          <p:blipFill>
+            <a:blip r:embed="rId8">
+              <a:extLst>
+                <a:ext uri="{28A0092B-C50C-407E-A947-70E740481C1C}">
+                  <a14:useLocalDpi xmlns:a14="http://schemas.microsoft.com/office/drawing/2010/main" val="0"/>
+                </a:ext>
+              </a:extLst>
+            </a:blip>
+            <a:stretch>
+              <a:fillRect/>
+            </a:stretch>
+          </p:blipFill>
+          <p:spPr>
+            <a:xfrm>
+              <a:off x="9568873" y="2420372"/>
+              <a:ext cx="626829" cy="718841"/>
+            </a:xfrm>
+            <a:prstGeom prst="rect">
+              <a:avLst/>
+            </a:prstGeom>
+          </p:spPr>
+        </p:pic>
+        <p:pic>
+          <p:nvPicPr>
+            <p:cNvPr id="11" name="그림 10">
+              <a:extLst>
+                <a:ext uri="{FF2B5EF4-FFF2-40B4-BE49-F238E27FC236}">
+                  <a16:creationId xmlns:a16="http://schemas.microsoft.com/office/drawing/2014/main" id="{22093A74-3BF2-110A-23A5-910CE0B0E341}"/>
+                </a:ext>
+              </a:extLst>
+            </p:cNvPr>
+            <p:cNvPicPr>
+              <a:picLocks noChangeAspect="1"/>
+            </p:cNvPicPr>
+            <p:nvPr/>
+          </p:nvPicPr>
+          <p:blipFill>
+            <a:blip r:embed="rId8">
+              <a:extLst>
+                <a:ext uri="{28A0092B-C50C-407E-A947-70E740481C1C}">
+                  <a14:useLocalDpi xmlns:a14="http://schemas.microsoft.com/office/drawing/2010/main" val="0"/>
+                </a:ext>
+              </a:extLst>
+            </a:blip>
+            <a:stretch>
+              <a:fillRect/>
+            </a:stretch>
+          </p:blipFill>
+          <p:spPr>
+            <a:xfrm>
+              <a:off x="8942044" y="2288443"/>
+              <a:ext cx="428456" cy="491349"/>
+            </a:xfrm>
+            <a:prstGeom prst="rect">
+              <a:avLst/>
+            </a:prstGeom>
+          </p:spPr>
+        </p:pic>
+      </p:grpSp>
+      <p:pic>
+        <p:nvPicPr>
+          <p:cNvPr id="3" name="그림 2">
+            <a:extLst>
+              <a:ext uri="{FF2B5EF4-FFF2-40B4-BE49-F238E27FC236}">
+                <a16:creationId xmlns:a16="http://schemas.microsoft.com/office/drawing/2014/main" id="{B7E856F7-7E69-CC01-CEA5-B62B04B9F3DE}"/>
+              </a:ext>
+            </a:extLst>
+          </p:cNvPr>
+          <p:cNvPicPr>
+            <a:picLocks noChangeAspect="1"/>
+          </p:cNvPicPr>
+          <p:nvPr/>
+        </p:nvPicPr>
+        <p:blipFill>
+          <a:blip r:embed="rId9">
+            <a:extLst>
+              <a:ext uri="{BEBA8EAE-BF5A-486C-A8C5-ECC9F3942E4B}">
+                <a14:imgProps xmlns:a14="http://schemas.microsoft.com/office/drawing/2010/main">
+                  <a14:imgLayer r:embed="rId10">
+                    <a14:imgEffect>
+                      <a14:brightnessContrast bright="100000"/>
+                    </a14:imgEffect>
+                  </a14:imgLayer>
+                </a14:imgProps>
+              </a:ext>
+            </a:extLst>
+          </a:blip>
+          <a:stretch>
+            <a:fillRect/>
+          </a:stretch>
+        </p:blipFill>
+        <p:spPr>
+          <a:xfrm>
+            <a:off x="7307766" y="3589444"/>
+            <a:ext cx="3268556" cy="3268556"/>
+          </a:xfrm>
+          <a:prstGeom prst="rect">
+            <a:avLst/>
+          </a:prstGeom>
+        </p:spPr>
+      </p:pic>
+    </p:spTree>
+    <p:extLst>
+      <p:ext uri="{BB962C8B-B14F-4D97-AF65-F5344CB8AC3E}">
+        <p14:creationId xmlns:p14="http://schemas.microsoft.com/office/powerpoint/2010/main" val="3987973835"/>
+      </p:ext>
+    </p:extLst>
+  </p:cSld>
+  <p:clrMapOvr>
+    <a:masterClrMapping/>
+  </p:clrMapOvr>
+</p:sld>
+</file>
+
 <file path=ppt/theme/theme1.xml><?xml version="1.0" encoding="utf-8"?>
 <a:theme xmlns:a="http://schemas.openxmlformats.org/drawingml/2006/main" name="Office 테마">
   <a:themeElements>

--- a/junk/stage.pptx
+++ b/junk/stage.pptx
@@ -262,7 +262,7 @@
           <a:p>
             <a:fld id="{37207A8B-0000-4D20-A8A7-3FE7CFF1FD16}" type="datetimeFigureOut">
               <a:rPr lang="ko-KR" altLang="en-US" smtClean="0"/>
-              <a:t>2025-05-11</a:t>
+              <a:t>2025-05-12</a:t>
             </a:fld>
             <a:endParaRPr lang="ko-KR" altLang="en-US"/>
           </a:p>
@@ -460,7 +460,7 @@
           <a:p>
             <a:fld id="{37207A8B-0000-4D20-A8A7-3FE7CFF1FD16}" type="datetimeFigureOut">
               <a:rPr lang="ko-KR" altLang="en-US" smtClean="0"/>
-              <a:t>2025-05-11</a:t>
+              <a:t>2025-05-12</a:t>
             </a:fld>
             <a:endParaRPr lang="ko-KR" altLang="en-US"/>
           </a:p>
@@ -668,7 +668,7 @@
           <a:p>
             <a:fld id="{37207A8B-0000-4D20-A8A7-3FE7CFF1FD16}" type="datetimeFigureOut">
               <a:rPr lang="ko-KR" altLang="en-US" smtClean="0"/>
-              <a:t>2025-05-11</a:t>
+              <a:t>2025-05-12</a:t>
             </a:fld>
             <a:endParaRPr lang="ko-KR" altLang="en-US"/>
           </a:p>
@@ -866,7 +866,7 @@
           <a:p>
             <a:fld id="{37207A8B-0000-4D20-A8A7-3FE7CFF1FD16}" type="datetimeFigureOut">
               <a:rPr lang="ko-KR" altLang="en-US" smtClean="0"/>
-              <a:t>2025-05-11</a:t>
+              <a:t>2025-05-12</a:t>
             </a:fld>
             <a:endParaRPr lang="ko-KR" altLang="en-US"/>
           </a:p>
@@ -1141,7 +1141,7 @@
           <a:p>
             <a:fld id="{37207A8B-0000-4D20-A8A7-3FE7CFF1FD16}" type="datetimeFigureOut">
               <a:rPr lang="ko-KR" altLang="en-US" smtClean="0"/>
-              <a:t>2025-05-11</a:t>
+              <a:t>2025-05-12</a:t>
             </a:fld>
             <a:endParaRPr lang="ko-KR" altLang="en-US"/>
           </a:p>
@@ -1406,7 +1406,7 @@
           <a:p>
             <a:fld id="{37207A8B-0000-4D20-A8A7-3FE7CFF1FD16}" type="datetimeFigureOut">
               <a:rPr lang="ko-KR" altLang="en-US" smtClean="0"/>
-              <a:t>2025-05-11</a:t>
+              <a:t>2025-05-12</a:t>
             </a:fld>
             <a:endParaRPr lang="ko-KR" altLang="en-US"/>
           </a:p>
@@ -1818,7 +1818,7 @@
           <a:p>
             <a:fld id="{37207A8B-0000-4D20-A8A7-3FE7CFF1FD16}" type="datetimeFigureOut">
               <a:rPr lang="ko-KR" altLang="en-US" smtClean="0"/>
-              <a:t>2025-05-11</a:t>
+              <a:t>2025-05-12</a:t>
             </a:fld>
             <a:endParaRPr lang="ko-KR" altLang="en-US"/>
           </a:p>
@@ -1959,7 +1959,7 @@
           <a:p>
             <a:fld id="{37207A8B-0000-4D20-A8A7-3FE7CFF1FD16}" type="datetimeFigureOut">
               <a:rPr lang="ko-KR" altLang="en-US" smtClean="0"/>
-              <a:t>2025-05-11</a:t>
+              <a:t>2025-05-12</a:t>
             </a:fld>
             <a:endParaRPr lang="ko-KR" altLang="en-US"/>
           </a:p>
@@ -2072,7 +2072,7 @@
           <a:p>
             <a:fld id="{37207A8B-0000-4D20-A8A7-3FE7CFF1FD16}" type="datetimeFigureOut">
               <a:rPr lang="ko-KR" altLang="en-US" smtClean="0"/>
-              <a:t>2025-05-11</a:t>
+              <a:t>2025-05-12</a:t>
             </a:fld>
             <a:endParaRPr lang="ko-KR" altLang="en-US"/>
           </a:p>
@@ -2383,7 +2383,7 @@
           <a:p>
             <a:fld id="{37207A8B-0000-4D20-A8A7-3FE7CFF1FD16}" type="datetimeFigureOut">
               <a:rPr lang="ko-KR" altLang="en-US" smtClean="0"/>
-              <a:t>2025-05-11</a:t>
+              <a:t>2025-05-12</a:t>
             </a:fld>
             <a:endParaRPr lang="ko-KR" altLang="en-US"/>
           </a:p>
@@ -2671,7 +2671,7 @@
           <a:p>
             <a:fld id="{37207A8B-0000-4D20-A8A7-3FE7CFF1FD16}" type="datetimeFigureOut">
               <a:rPr lang="ko-KR" altLang="en-US" smtClean="0"/>
-              <a:t>2025-05-11</a:t>
+              <a:t>2025-05-12</a:t>
             </a:fld>
             <a:endParaRPr lang="ko-KR" altLang="en-US"/>
           </a:p>
@@ -2912,7 +2912,7 @@
           <a:p>
             <a:fld id="{37207A8B-0000-4D20-A8A7-3FE7CFF1FD16}" type="datetimeFigureOut">
               <a:rPr lang="ko-KR" altLang="en-US" smtClean="0"/>
-              <a:t>2025-05-11</a:t>
+              <a:t>2025-05-12</a:t>
             </a:fld>
             <a:endParaRPr lang="ko-KR" altLang="en-US"/>
           </a:p>
@@ -20488,6 +20488,118 @@
           </a:prstGeom>
         </p:spPr>
       </p:pic>
+      <p:pic>
+        <p:nvPicPr>
+          <p:cNvPr id="1026" name="Picture 2" descr="Solar System Miniature - Official Eternal Return Wiki">
+            <a:extLst>
+              <a:ext uri="{FF2B5EF4-FFF2-40B4-BE49-F238E27FC236}">
+                <a16:creationId xmlns:a16="http://schemas.microsoft.com/office/drawing/2014/main" id="{537B4F72-07DA-2A7A-97BF-15485B19C4A4}"/>
+              </a:ext>
+            </a:extLst>
+          </p:cNvPr>
+          <p:cNvPicPr>
+            <a:picLocks noChangeAspect="1" noChangeArrowheads="1"/>
+          </p:cNvPicPr>
+          <p:nvPr/>
+        </p:nvPicPr>
+        <p:blipFill>
+          <a:blip r:embed="rId11">
+            <a:extLst>
+              <a:ext uri="{BEBA8EAE-BF5A-486C-A8C5-ECC9F3942E4B}">
+                <a14:imgProps xmlns:a14="http://schemas.microsoft.com/office/drawing/2010/main">
+                  <a14:imgLayer r:embed="rId12">
+                    <a14:imgEffect>
+                      <a14:brightnessContrast bright="100000"/>
+                    </a14:imgEffect>
+                  </a14:imgLayer>
+                </a14:imgProps>
+              </a:ext>
+              <a:ext uri="{28A0092B-C50C-407E-A947-70E740481C1C}">
+                <a14:useLocalDpi xmlns:a14="http://schemas.microsoft.com/office/drawing/2010/main" val="0"/>
+              </a:ext>
+            </a:extLst>
+          </a:blip>
+          <a:srcRect/>
+          <a:stretch>
+            <a:fillRect/>
+          </a:stretch>
+        </p:blipFill>
+        <p:spPr bwMode="auto">
+          <a:xfrm>
+            <a:off x="536665" y="1786663"/>
+            <a:ext cx="2438400" cy="1352550"/>
+          </a:xfrm>
+          <a:prstGeom prst="rect">
+            <a:avLst/>
+          </a:prstGeom>
+          <a:noFill/>
+          <a:extLst>
+            <a:ext uri="{909E8E84-426E-40DD-AFC4-6F175D3DCCD1}">
+              <a14:hiddenFill xmlns:a14="http://schemas.microsoft.com/office/drawing/2010/main">
+                <a:solidFill>
+                  <a:srgbClr val="FFFFFF"/>
+                </a:solidFill>
+              </a14:hiddenFill>
+            </a:ext>
+          </a:extLst>
+        </p:spPr>
+      </p:pic>
+      <p:pic>
+        <p:nvPicPr>
+          <p:cNvPr id="1032" name="Picture 8" descr="생성된 이미지">
+            <a:extLst>
+              <a:ext uri="{FF2B5EF4-FFF2-40B4-BE49-F238E27FC236}">
+                <a16:creationId xmlns:a16="http://schemas.microsoft.com/office/drawing/2014/main" id="{BF1AEBE8-02DC-099E-F148-D1906778C19A}"/>
+              </a:ext>
+            </a:extLst>
+          </p:cNvPr>
+          <p:cNvPicPr>
+            <a:picLocks noChangeAspect="1" noChangeArrowheads="1"/>
+          </p:cNvPicPr>
+          <p:nvPr/>
+        </p:nvPicPr>
+        <p:blipFill>
+          <a:blip r:embed="rId13">
+            <a:extLst>
+              <a:ext uri="{BEBA8EAE-BF5A-486C-A8C5-ECC9F3942E4B}">
+                <a14:imgProps xmlns:a14="http://schemas.microsoft.com/office/drawing/2010/main">
+                  <a14:imgLayer r:embed="rId14">
+                    <a14:imgEffect>
+                      <a14:brightnessContrast bright="100000"/>
+                    </a14:imgEffect>
+                  </a14:imgLayer>
+                </a14:imgProps>
+              </a:ext>
+              <a:ext uri="{28A0092B-C50C-407E-A947-70E740481C1C}">
+                <a14:useLocalDpi xmlns:a14="http://schemas.microsoft.com/office/drawing/2010/main" val="0"/>
+              </a:ext>
+            </a:extLst>
+          </a:blip>
+          <a:srcRect/>
+          <a:stretch>
+            <a:fillRect/>
+          </a:stretch>
+        </p:blipFill>
+        <p:spPr bwMode="auto">
+          <a:xfrm>
+            <a:off x="4431143" y="4469538"/>
+            <a:ext cx="2217235" cy="2217235"/>
+          </a:xfrm>
+          <a:prstGeom prst="rect">
+            <a:avLst/>
+          </a:prstGeom>
+          <a:noFill/>
+          <a:extLst>
+            <a:ext uri="{909E8E84-426E-40DD-AFC4-6F175D3DCCD1}">
+              <a14:hiddenFill xmlns:a14="http://schemas.microsoft.com/office/drawing/2010/main">
+                <a:solidFill>
+                  <a:srgbClr val="FFFFFF"/>
+                </a:solidFill>
+              </a14:hiddenFill>
+            </a:ext>
+          </a:extLst>
+        </p:spPr>
+      </p:pic>
     </p:spTree>
     <p:extLst>
       <p:ext uri="{BB962C8B-B14F-4D97-AF65-F5344CB8AC3E}">

--- a/junk/stage.pptx
+++ b/junk/stage.pptx
@@ -9,6 +9,7 @@
     <p:sldId id="257" r:id="rId3"/>
     <p:sldId id="258" r:id="rId4"/>
     <p:sldId id="259" r:id="rId5"/>
+    <p:sldId id="260" r:id="rId6"/>
   </p:sldIdLst>
   <p:sldSz cx="12192000" cy="6858000"/>
   <p:notesSz cx="6858000" cy="9144000"/>
@@ -262,7 +263,7 @@
           <a:p>
             <a:fld id="{37207A8B-0000-4D20-A8A7-3FE7CFF1FD16}" type="datetimeFigureOut">
               <a:rPr lang="ko-KR" altLang="en-US" smtClean="0"/>
-              <a:t>2025-05-12</a:t>
+              <a:t>2025-05-13</a:t>
             </a:fld>
             <a:endParaRPr lang="ko-KR" altLang="en-US"/>
           </a:p>
@@ -460,7 +461,7 @@
           <a:p>
             <a:fld id="{37207A8B-0000-4D20-A8A7-3FE7CFF1FD16}" type="datetimeFigureOut">
               <a:rPr lang="ko-KR" altLang="en-US" smtClean="0"/>
-              <a:t>2025-05-12</a:t>
+              <a:t>2025-05-13</a:t>
             </a:fld>
             <a:endParaRPr lang="ko-KR" altLang="en-US"/>
           </a:p>
@@ -668,7 +669,7 @@
           <a:p>
             <a:fld id="{37207A8B-0000-4D20-A8A7-3FE7CFF1FD16}" type="datetimeFigureOut">
               <a:rPr lang="ko-KR" altLang="en-US" smtClean="0"/>
-              <a:t>2025-05-12</a:t>
+              <a:t>2025-05-13</a:t>
             </a:fld>
             <a:endParaRPr lang="ko-KR" altLang="en-US"/>
           </a:p>
@@ -866,7 +867,7 @@
           <a:p>
             <a:fld id="{37207A8B-0000-4D20-A8A7-3FE7CFF1FD16}" type="datetimeFigureOut">
               <a:rPr lang="ko-KR" altLang="en-US" smtClean="0"/>
-              <a:t>2025-05-12</a:t>
+              <a:t>2025-05-13</a:t>
             </a:fld>
             <a:endParaRPr lang="ko-KR" altLang="en-US"/>
           </a:p>
@@ -1141,7 +1142,7 @@
           <a:p>
             <a:fld id="{37207A8B-0000-4D20-A8A7-3FE7CFF1FD16}" type="datetimeFigureOut">
               <a:rPr lang="ko-KR" altLang="en-US" smtClean="0"/>
-              <a:t>2025-05-12</a:t>
+              <a:t>2025-05-13</a:t>
             </a:fld>
             <a:endParaRPr lang="ko-KR" altLang="en-US"/>
           </a:p>
@@ -1406,7 +1407,7 @@
           <a:p>
             <a:fld id="{37207A8B-0000-4D20-A8A7-3FE7CFF1FD16}" type="datetimeFigureOut">
               <a:rPr lang="ko-KR" altLang="en-US" smtClean="0"/>
-              <a:t>2025-05-12</a:t>
+              <a:t>2025-05-13</a:t>
             </a:fld>
             <a:endParaRPr lang="ko-KR" altLang="en-US"/>
           </a:p>
@@ -1818,7 +1819,7 @@
           <a:p>
             <a:fld id="{37207A8B-0000-4D20-A8A7-3FE7CFF1FD16}" type="datetimeFigureOut">
               <a:rPr lang="ko-KR" altLang="en-US" smtClean="0"/>
-              <a:t>2025-05-12</a:t>
+              <a:t>2025-05-13</a:t>
             </a:fld>
             <a:endParaRPr lang="ko-KR" altLang="en-US"/>
           </a:p>
@@ -1959,7 +1960,7 @@
           <a:p>
             <a:fld id="{37207A8B-0000-4D20-A8A7-3FE7CFF1FD16}" type="datetimeFigureOut">
               <a:rPr lang="ko-KR" altLang="en-US" smtClean="0"/>
-              <a:t>2025-05-12</a:t>
+              <a:t>2025-05-13</a:t>
             </a:fld>
             <a:endParaRPr lang="ko-KR" altLang="en-US"/>
           </a:p>
@@ -2072,7 +2073,7 @@
           <a:p>
             <a:fld id="{37207A8B-0000-4D20-A8A7-3FE7CFF1FD16}" type="datetimeFigureOut">
               <a:rPr lang="ko-KR" altLang="en-US" smtClean="0"/>
-              <a:t>2025-05-12</a:t>
+              <a:t>2025-05-13</a:t>
             </a:fld>
             <a:endParaRPr lang="ko-KR" altLang="en-US"/>
           </a:p>
@@ -2383,7 +2384,7 @@
           <a:p>
             <a:fld id="{37207A8B-0000-4D20-A8A7-3FE7CFF1FD16}" type="datetimeFigureOut">
               <a:rPr lang="ko-KR" altLang="en-US" smtClean="0"/>
-              <a:t>2025-05-12</a:t>
+              <a:t>2025-05-13</a:t>
             </a:fld>
             <a:endParaRPr lang="ko-KR" altLang="en-US"/>
           </a:p>
@@ -2671,7 +2672,7 @@
           <a:p>
             <a:fld id="{37207A8B-0000-4D20-A8A7-3FE7CFF1FD16}" type="datetimeFigureOut">
               <a:rPr lang="ko-KR" altLang="en-US" smtClean="0"/>
-              <a:t>2025-05-12</a:t>
+              <a:t>2025-05-13</a:t>
             </a:fld>
             <a:endParaRPr lang="ko-KR" altLang="en-US"/>
           </a:p>
@@ -2912,7 +2913,7 @@
           <a:p>
             <a:fld id="{37207A8B-0000-4D20-A8A7-3FE7CFF1FD16}" type="datetimeFigureOut">
               <a:rPr lang="ko-KR" altLang="en-US" smtClean="0"/>
-              <a:t>2025-05-12</a:t>
+              <a:t>2025-05-13</a:t>
             </a:fld>
             <a:endParaRPr lang="ko-KR" altLang="en-US"/>
           </a:p>
@@ -20600,10 +20601,191 @@
           </a:extLst>
         </p:spPr>
       </p:pic>
+      <p:pic>
+        <p:nvPicPr>
+          <p:cNvPr id="13" name="그림 12">
+            <a:extLst>
+              <a:ext uri="{FF2B5EF4-FFF2-40B4-BE49-F238E27FC236}">
+                <a16:creationId xmlns:a16="http://schemas.microsoft.com/office/drawing/2014/main" id="{AF3CE0D7-7C1A-2BAC-2E6E-C8308F952A22}"/>
+              </a:ext>
+            </a:extLst>
+          </p:cNvPr>
+          <p:cNvPicPr>
+            <a:picLocks noChangeAspect="1"/>
+          </p:cNvPicPr>
+          <p:nvPr/>
+        </p:nvPicPr>
+        <p:blipFill>
+          <a:blip r:embed="rId15">
+            <a:extLst>
+              <a:ext uri="{BEBA8EAE-BF5A-486C-A8C5-ECC9F3942E4B}">
+                <a14:imgProps xmlns:a14="http://schemas.microsoft.com/office/drawing/2010/main">
+                  <a14:imgLayer r:embed="rId16">
+                    <a14:imgEffect>
+                      <a14:brightnessContrast bright="100000"/>
+                    </a14:imgEffect>
+                  </a14:imgLayer>
+                </a14:imgProps>
+              </a:ext>
+            </a:extLst>
+          </a:blip>
+          <a:stretch>
+            <a:fillRect/>
+          </a:stretch>
+        </p:blipFill>
+        <p:spPr>
+          <a:xfrm>
+            <a:off x="-132407" y="3429000"/>
+            <a:ext cx="2822571" cy="2822571"/>
+          </a:xfrm>
+          <a:prstGeom prst="rect">
+            <a:avLst/>
+          </a:prstGeom>
+        </p:spPr>
+      </p:pic>
+      <p:pic>
+        <p:nvPicPr>
+          <p:cNvPr id="17" name="그림 16">
+            <a:extLst>
+              <a:ext uri="{FF2B5EF4-FFF2-40B4-BE49-F238E27FC236}">
+                <a16:creationId xmlns:a16="http://schemas.microsoft.com/office/drawing/2014/main" id="{C9618EF0-A7D4-C29C-60DF-93B09501A94A}"/>
+              </a:ext>
+            </a:extLst>
+          </p:cNvPr>
+          <p:cNvPicPr>
+            <a:picLocks noChangeAspect="1"/>
+          </p:cNvPicPr>
+          <p:nvPr/>
+        </p:nvPicPr>
+        <p:blipFill>
+          <a:blip r:embed="rId17">
+            <a:extLst>
+              <a:ext uri="{BEBA8EAE-BF5A-486C-A8C5-ECC9F3942E4B}">
+                <a14:imgProps xmlns:a14="http://schemas.microsoft.com/office/drawing/2010/main">
+                  <a14:imgLayer r:embed="rId18">
+                    <a14:imgEffect>
+                      <a14:brightnessContrast bright="100000"/>
+                    </a14:imgEffect>
+                  </a14:imgLayer>
+                </a14:imgProps>
+              </a:ext>
+            </a:extLst>
+          </a:blip>
+          <a:stretch>
+            <a:fillRect/>
+          </a:stretch>
+        </p:blipFill>
+        <p:spPr>
+          <a:xfrm>
+            <a:off x="7185756" y="336067"/>
+            <a:ext cx="1514897" cy="1514897"/>
+          </a:xfrm>
+          <a:prstGeom prst="rect">
+            <a:avLst/>
+          </a:prstGeom>
+        </p:spPr>
+      </p:pic>
     </p:spTree>
     <p:extLst>
       <p:ext uri="{BB962C8B-B14F-4D97-AF65-F5344CB8AC3E}">
         <p14:creationId xmlns:p14="http://schemas.microsoft.com/office/powerpoint/2010/main" val="3987973835"/>
+      </p:ext>
+    </p:extLst>
+  </p:cSld>
+  <p:clrMapOvr>
+    <a:masterClrMapping/>
+  </p:clrMapOvr>
+</p:sld>
+</file>
+
+<file path=ppt/slides/slide5.xml><?xml version="1.0" encoding="utf-8"?>
+<p:sld xmlns:a="http://schemas.openxmlformats.org/drawingml/2006/main" xmlns:r="http://schemas.openxmlformats.org/officeDocument/2006/relationships" xmlns:p="http://schemas.openxmlformats.org/presentationml/2006/main">
+  <p:cSld>
+    <p:bg>
+      <p:bgPr>
+        <a:solidFill>
+          <a:schemeClr val="tx1"/>
+        </a:solidFill>
+        <a:effectLst/>
+      </p:bgPr>
+    </p:bg>
+    <p:spTree>
+      <p:nvGrpSpPr>
+        <p:cNvPr id="1" name=""/>
+        <p:cNvGrpSpPr/>
+        <p:nvPr/>
+      </p:nvGrpSpPr>
+      <p:grpSpPr>
+        <a:xfrm>
+          <a:off x="0" y="0"/>
+          <a:ext cx="0" cy="0"/>
+          <a:chOff x="0" y="0"/>
+          <a:chExt cx="0" cy="0"/>
+        </a:xfrm>
+      </p:grpSpPr>
+      <p:pic>
+        <p:nvPicPr>
+          <p:cNvPr id="2050" name="Picture 2" descr="Fire Light Circle, Fire, Light, Circle PNG Transparent Image and Clipart  for Free Download">
+            <a:extLst>
+              <a:ext uri="{FF2B5EF4-FFF2-40B4-BE49-F238E27FC236}">
+                <a16:creationId xmlns:a16="http://schemas.microsoft.com/office/drawing/2014/main" id="{F7013D8A-4358-5E52-6D39-03AFD5536A80}"/>
+              </a:ext>
+            </a:extLst>
+          </p:cNvPr>
+          <p:cNvPicPr>
+            <a:picLocks noChangeAspect="1" noChangeArrowheads="1"/>
+          </p:cNvPicPr>
+          <p:nvPr/>
+        </p:nvPicPr>
+        <p:blipFill>
+          <a:blip r:embed="rId2">
+            <a:extLst>
+              <a:ext uri="{BEBA8EAE-BF5A-486C-A8C5-ECC9F3942E4B}">
+                <a14:imgProps xmlns:a14="http://schemas.microsoft.com/office/drawing/2010/main">
+                  <a14:imgLayer r:embed="rId3">
+                    <a14:imgEffect>
+                      <a14:saturation sat="0"/>
+                    </a14:imgEffect>
+                    <a14:imgEffect>
+                      <a14:brightnessContrast bright="35000"/>
+                    </a14:imgEffect>
+                  </a14:imgLayer>
+                </a14:imgProps>
+              </a:ext>
+              <a:ext uri="{28A0092B-C50C-407E-A947-70E740481C1C}">
+                <a14:useLocalDpi xmlns:a14="http://schemas.microsoft.com/office/drawing/2010/main" val="0"/>
+              </a:ext>
+            </a:extLst>
+          </a:blip>
+          <a:srcRect/>
+          <a:stretch>
+            <a:fillRect/>
+          </a:stretch>
+        </p:blipFill>
+        <p:spPr bwMode="auto">
+          <a:xfrm>
+            <a:off x="142009" y="138546"/>
+            <a:ext cx="3429000" cy="3429000"/>
+          </a:xfrm>
+          <a:prstGeom prst="rect">
+            <a:avLst/>
+          </a:prstGeom>
+          <a:noFill/>
+          <a:extLst>
+            <a:ext uri="{909E8E84-426E-40DD-AFC4-6F175D3DCCD1}">
+              <a14:hiddenFill xmlns:a14="http://schemas.microsoft.com/office/drawing/2010/main">
+                <a:solidFill>
+                  <a:srgbClr val="FFFFFF"/>
+                </a:solidFill>
+              </a14:hiddenFill>
+            </a:ext>
+          </a:extLst>
+        </p:spPr>
+      </p:pic>
+    </p:spTree>
+    <p:extLst>
+      <p:ext uri="{BB962C8B-B14F-4D97-AF65-F5344CB8AC3E}">
+        <p14:creationId xmlns:p14="http://schemas.microsoft.com/office/powerpoint/2010/main" val="511199052"/>
       </p:ext>
     </p:extLst>
   </p:cSld>

--- a/junk/stage.pptx
+++ b/junk/stage.pptx
@@ -20782,6 +20782,66 @@
           </a:extLst>
         </p:spPr>
       </p:pic>
+      <p:sp>
+        <p:nvSpPr>
+          <p:cNvPr id="2" name="원형: 비어 있음 1">
+            <a:extLst>
+              <a:ext uri="{FF2B5EF4-FFF2-40B4-BE49-F238E27FC236}">
+                <a16:creationId xmlns:a16="http://schemas.microsoft.com/office/drawing/2014/main" id="{E10091F2-DAF9-F1F5-57ED-5F4363A18988}"/>
+              </a:ext>
+            </a:extLst>
+          </p:cNvPr>
+          <p:cNvSpPr/>
+          <p:nvPr/>
+        </p:nvSpPr>
+        <p:spPr>
+          <a:xfrm>
+            <a:off x="5770485" y="1455938"/>
+            <a:ext cx="1642369" cy="1642369"/>
+          </a:xfrm>
+          <a:prstGeom prst="donut">
+            <a:avLst>
+              <a:gd name="adj" fmla="val 24009"/>
+            </a:avLst>
+          </a:prstGeom>
+          <a:solidFill>
+            <a:schemeClr val="bg1">
+              <a:lumMod val="95000"/>
+            </a:schemeClr>
+          </a:solidFill>
+          <a:ln>
+            <a:noFill/>
+          </a:ln>
+        </p:spPr>
+        <p:style>
+          <a:lnRef idx="2">
+            <a:schemeClr val="accent1">
+              <a:shade val="15000"/>
+            </a:schemeClr>
+          </a:lnRef>
+          <a:fillRef idx="1">
+            <a:schemeClr val="accent1"/>
+          </a:fillRef>
+          <a:effectRef idx="0">
+            <a:schemeClr val="accent1"/>
+          </a:effectRef>
+          <a:fontRef idx="minor">
+            <a:schemeClr val="lt1"/>
+          </a:fontRef>
+        </p:style>
+        <p:txBody>
+          <a:bodyPr rtlCol="0" anchor="ctr"/>
+          <a:lstStyle/>
+          <a:p>
+            <a:pPr algn="ctr"/>
+            <a:endParaRPr lang="ko-KR" altLang="en-US" dirty="0">
+              <a:solidFill>
+                <a:schemeClr val="tx1"/>
+              </a:solidFill>
+            </a:endParaRPr>
+          </a:p>
+        </p:txBody>
+      </p:sp>
     </p:spTree>
     <p:extLst>
       <p:ext uri="{BB962C8B-B14F-4D97-AF65-F5344CB8AC3E}">

--- a/junk/stage.pptx
+++ b/junk/stage.pptx
@@ -263,7 +263,7 @@
           <a:p>
             <a:fld id="{37207A8B-0000-4D20-A8A7-3FE7CFF1FD16}" type="datetimeFigureOut">
               <a:rPr lang="ko-KR" altLang="en-US" smtClean="0"/>
-              <a:t>2025-05-13</a:t>
+              <a:t>2025-06-13</a:t>
             </a:fld>
             <a:endParaRPr lang="ko-KR" altLang="en-US"/>
           </a:p>
@@ -461,7 +461,7 @@
           <a:p>
             <a:fld id="{37207A8B-0000-4D20-A8A7-3FE7CFF1FD16}" type="datetimeFigureOut">
               <a:rPr lang="ko-KR" altLang="en-US" smtClean="0"/>
-              <a:t>2025-05-13</a:t>
+              <a:t>2025-06-13</a:t>
             </a:fld>
             <a:endParaRPr lang="ko-KR" altLang="en-US"/>
           </a:p>
@@ -669,7 +669,7 @@
           <a:p>
             <a:fld id="{37207A8B-0000-4D20-A8A7-3FE7CFF1FD16}" type="datetimeFigureOut">
               <a:rPr lang="ko-KR" altLang="en-US" smtClean="0"/>
-              <a:t>2025-05-13</a:t>
+              <a:t>2025-06-13</a:t>
             </a:fld>
             <a:endParaRPr lang="ko-KR" altLang="en-US"/>
           </a:p>
@@ -867,7 +867,7 @@
           <a:p>
             <a:fld id="{37207A8B-0000-4D20-A8A7-3FE7CFF1FD16}" type="datetimeFigureOut">
               <a:rPr lang="ko-KR" altLang="en-US" smtClean="0"/>
-              <a:t>2025-05-13</a:t>
+              <a:t>2025-06-13</a:t>
             </a:fld>
             <a:endParaRPr lang="ko-KR" altLang="en-US"/>
           </a:p>
@@ -1142,7 +1142,7 @@
           <a:p>
             <a:fld id="{37207A8B-0000-4D20-A8A7-3FE7CFF1FD16}" type="datetimeFigureOut">
               <a:rPr lang="ko-KR" altLang="en-US" smtClean="0"/>
-              <a:t>2025-05-13</a:t>
+              <a:t>2025-06-13</a:t>
             </a:fld>
             <a:endParaRPr lang="ko-KR" altLang="en-US"/>
           </a:p>
@@ -1407,7 +1407,7 @@
           <a:p>
             <a:fld id="{37207A8B-0000-4D20-A8A7-3FE7CFF1FD16}" type="datetimeFigureOut">
               <a:rPr lang="ko-KR" altLang="en-US" smtClean="0"/>
-              <a:t>2025-05-13</a:t>
+              <a:t>2025-06-13</a:t>
             </a:fld>
             <a:endParaRPr lang="ko-KR" altLang="en-US"/>
           </a:p>
@@ -1819,7 +1819,7 @@
           <a:p>
             <a:fld id="{37207A8B-0000-4D20-A8A7-3FE7CFF1FD16}" type="datetimeFigureOut">
               <a:rPr lang="ko-KR" altLang="en-US" smtClean="0"/>
-              <a:t>2025-05-13</a:t>
+              <a:t>2025-06-13</a:t>
             </a:fld>
             <a:endParaRPr lang="ko-KR" altLang="en-US"/>
           </a:p>
@@ -1960,7 +1960,7 @@
           <a:p>
             <a:fld id="{37207A8B-0000-4D20-A8A7-3FE7CFF1FD16}" type="datetimeFigureOut">
               <a:rPr lang="ko-KR" altLang="en-US" smtClean="0"/>
-              <a:t>2025-05-13</a:t>
+              <a:t>2025-06-13</a:t>
             </a:fld>
             <a:endParaRPr lang="ko-KR" altLang="en-US"/>
           </a:p>
@@ -2073,7 +2073,7 @@
           <a:p>
             <a:fld id="{37207A8B-0000-4D20-A8A7-3FE7CFF1FD16}" type="datetimeFigureOut">
               <a:rPr lang="ko-KR" altLang="en-US" smtClean="0"/>
-              <a:t>2025-05-13</a:t>
+              <a:t>2025-06-13</a:t>
             </a:fld>
             <a:endParaRPr lang="ko-KR" altLang="en-US"/>
           </a:p>
@@ -2384,7 +2384,7 @@
           <a:p>
             <a:fld id="{37207A8B-0000-4D20-A8A7-3FE7CFF1FD16}" type="datetimeFigureOut">
               <a:rPr lang="ko-KR" altLang="en-US" smtClean="0"/>
-              <a:t>2025-05-13</a:t>
+              <a:t>2025-06-13</a:t>
             </a:fld>
             <a:endParaRPr lang="ko-KR" altLang="en-US"/>
           </a:p>
@@ -2672,7 +2672,7 @@
           <a:p>
             <a:fld id="{37207A8B-0000-4D20-A8A7-3FE7CFF1FD16}" type="datetimeFigureOut">
               <a:rPr lang="ko-KR" altLang="en-US" smtClean="0"/>
-              <a:t>2025-05-13</a:t>
+              <a:t>2025-06-13</a:t>
             </a:fld>
             <a:endParaRPr lang="ko-KR" altLang="en-US"/>
           </a:p>
@@ -2913,7 +2913,7 @@
           <a:p>
             <a:fld id="{37207A8B-0000-4D20-A8A7-3FE7CFF1FD16}" type="datetimeFigureOut">
               <a:rPr lang="ko-KR" altLang="en-US" smtClean="0"/>
-              <a:t>2025-05-13</a:t>
+              <a:t>2025-06-13</a:t>
             </a:fld>
             <a:endParaRPr lang="ko-KR" altLang="en-US"/>
           </a:p>
@@ -20842,6 +20842,120 @@
           </a:p>
         </p:txBody>
       </p:sp>
+      <p:pic>
+        <p:nvPicPr>
+          <p:cNvPr id="1026" name="Picture 2" descr="10+ Thousand Snake Eye Vector Royalty-Free Images, Stock Photos &amp; Pictures  | Shutterstock">
+            <a:extLst>
+              <a:ext uri="{FF2B5EF4-FFF2-40B4-BE49-F238E27FC236}">
+                <a16:creationId xmlns:a16="http://schemas.microsoft.com/office/drawing/2014/main" id="{3D3590DB-093E-A6BE-970B-267BED97A10D}"/>
+              </a:ext>
+            </a:extLst>
+          </p:cNvPr>
+          <p:cNvPicPr>
+            <a:picLocks noChangeAspect="1" noChangeArrowheads="1"/>
+          </p:cNvPicPr>
+          <p:nvPr/>
+        </p:nvPicPr>
+        <p:blipFill rotWithShape="1">
+          <a:blip r:embed="rId4">
+            <a:extLst>
+              <a:ext uri="{BEBA8EAE-BF5A-486C-A8C5-ECC9F3942E4B}">
+                <a14:imgProps xmlns:a14="http://schemas.microsoft.com/office/drawing/2010/main">
+                  <a14:imgLayer r:embed="rId5">
+                    <a14:imgEffect>
+                      <a14:backgroundRemoval t="54286" b="83929" l="16731" r="84231">
+                        <a14:foregroundMark x1="19038" y1="57143" x2="16731" y2="57500"/>
+                        <a14:foregroundMark x1="79545" y1="53929" x2="79808" y2="53571"/>
+                        <a14:foregroundMark x1="63047" y1="76398" x2="79545" y2="53929"/>
+                        <a14:foregroundMark x1="82674" y1="72500" x2="82764" y2="73091"/>
+                        <a14:foregroundMark x1="82641" y1="72282" x2="82674" y2="72500"/>
+                        <a14:foregroundMark x1="79862" y1="53929" x2="80570" y2="58603"/>
+                        <a14:foregroundMark x1="79808" y1="53571" x2="79862" y2="53929"/>
+                        <a14:foregroundMark x1="70218" y1="78981" x2="64652" y2="80068"/>
+                        <a14:foregroundMark x1="74473" y1="78149" x2="74291" y2="78185"/>
+                        <a14:foregroundMark x1="81693" y1="76737" x2="80778" y2="76916"/>
+                        <a14:foregroundMark x1="75192" y1="65000" x2="75000" y2="71786"/>
+                        <a14:foregroundMark x1="83654" y1="56786" x2="83654" y2="56786"/>
+                        <a14:foregroundMark x1="72308" y1="80357" x2="72308" y2="80357"/>
+                        <a14:foregroundMark x1="70962" y1="80000" x2="70962" y2="80000"/>
+                        <a14:foregroundMark x1="70577" y1="79643" x2="70577" y2="79643"/>
+                        <a14:foregroundMark x1="80192" y1="54286" x2="80192" y2="54286"/>
+                        <a14:foregroundMark x1="80577" y1="54286" x2="79615" y2="54643"/>
+                        <a14:backgroundMark x1="80962" y1="65357" x2="78846" y2="72500"/>
+                        <a14:backgroundMark x1="81923" y1="62500" x2="82692" y2="66071"/>
+                        <a14:backgroundMark x1="81346" y1="62500" x2="81346" y2="62500"/>
+                        <a14:backgroundMark x1="81154" y1="61786" x2="81538" y2="64643"/>
+                        <a14:backgroundMark x1="81154" y1="60357" x2="80577" y2="61786"/>
+                        <a14:backgroundMark x1="81538" y1="61429" x2="80577" y2="61429"/>
+                        <a14:backgroundMark x1="77500" y1="77143" x2="75962" y2="77500"/>
+                        <a14:backgroundMark x1="79872" y1="76786" x2="78462" y2="77500"/>
+                        <a14:backgroundMark x1="80577" y1="76429" x2="79872" y2="76786"/>
+                        <a14:backgroundMark x1="78462" y1="76429" x2="77115" y2="77500"/>
+                        <a14:backgroundMark x1="72115" y1="78571" x2="73269" y2="79286"/>
+                        <a14:backgroundMark x1="75769" y1="77143" x2="74231" y2="77500"/>
+                        <a14:backgroundMark x1="74423" y1="78571" x2="73846" y2="78571"/>
+                        <a14:backgroundMark x1="71538" y1="79286" x2="70577" y2="79286"/>
+                        <a14:backgroundMark x1="60962" y1="81429" x2="64038" y2="81786"/>
+                        <a14:backgroundMark x1="65385" y1="81071" x2="65385" y2="81071"/>
+                        <a14:backgroundMark x1="65385" y1="80714" x2="65385" y2="80714"/>
+                        <a14:backgroundMark x1="64423" y1="80357" x2="64423" y2="80357"/>
+                        <a14:backgroundMark x1="65192" y1="80357" x2="65577" y2="81786"/>
+                        <a14:backgroundMark x1="71538" y1="78571" x2="71538" y2="78571"/>
+                        <a14:backgroundMark x1="83134" y1="77587" x2="82115" y2="77857"/>
+                        <a14:backgroundMark x1="83846" y1="77500" x2="82500" y2="77500"/>
+                        <a14:backgroundMark x1="84808" y1="76071" x2="84038" y2="77500"/>
+                        <a14:backgroundMark x1="82500" y1="71786" x2="82500" y2="71786"/>
+                        <a14:backgroundMark x1="82308" y1="72500" x2="82308" y2="72500"/>
+                        <a14:backgroundMark x1="70962" y1="78214" x2="70577" y2="78214"/>
+                        <a14:backgroundMark x1="70577" y1="78929" x2="70577" y2="78929"/>
+                        <a14:backgroundMark x1="70577" y1="78571" x2="70000" y2="78214"/>
+                        <a14:backgroundMark x1="70769" y1="78929" x2="70192" y2="78214"/>
+                        <a14:backgroundMark x1="70769" y1="78929" x2="70000" y2="78214"/>
+                        <a14:backgroundMark x1="70000" y1="78571" x2="70000" y2="78571"/>
+                        <a14:backgroundMark x1="70000" y1="78214" x2="70000" y2="78214"/>
+                        <a14:backgroundMark x1="64615" y1="80357" x2="64615" y2="80357"/>
+                        <a14:backgroundMark x1="75000" y1="78214" x2="75000" y2="78214"/>
+                        <a14:backgroundMark x1="75192" y1="78214" x2="75192" y2="78214"/>
+                        <a14:backgroundMark x1="75962" y1="77857" x2="74615" y2="78571"/>
+                        <a14:backgroundMark x1="71154" y1="77857" x2="71923" y2="78929"/>
+                      </a14:backgroundRemoval>
+                    </a14:imgEffect>
+                    <a14:imgEffect>
+                      <a14:brightnessContrast bright="100000"/>
+                    </a14:imgEffect>
+                  </a14:imgLayer>
+                </a14:imgProps>
+              </a:ext>
+              <a:ext uri="{28A0092B-C50C-407E-A947-70E740481C1C}">
+                <a14:useLocalDpi xmlns:a14="http://schemas.microsoft.com/office/drawing/2010/main" val="0"/>
+              </a:ext>
+            </a:extLst>
+          </a:blip>
+          <a:srcRect l="12420" t="50977" r="13734" b="12407"/>
+          <a:stretch>
+            <a:fillRect/>
+          </a:stretch>
+        </p:blipFill>
+        <p:spPr bwMode="auto">
+          <a:xfrm>
+            <a:off x="2370338" y="4425518"/>
+            <a:ext cx="3657600" cy="976544"/>
+          </a:xfrm>
+          <a:prstGeom prst="rect">
+            <a:avLst/>
+          </a:prstGeom>
+          <a:noFill/>
+          <a:extLst>
+            <a:ext uri="{909E8E84-426E-40DD-AFC4-6F175D3DCCD1}">
+              <a14:hiddenFill xmlns:a14="http://schemas.microsoft.com/office/drawing/2010/main">
+                <a:solidFill>
+                  <a:srgbClr val="FFFFFF"/>
+                </a:solidFill>
+              </a14:hiddenFill>
+            </a:ext>
+          </a:extLst>
+        </p:spPr>
+      </p:pic>
     </p:spTree>
     <p:extLst>
       <p:ext uri="{BB962C8B-B14F-4D97-AF65-F5344CB8AC3E}">

--- a/junk/stage.pptx
+++ b/junk/stage.pptx
@@ -263,7 +263,7 @@
           <a:p>
             <a:fld id="{37207A8B-0000-4D20-A8A7-3FE7CFF1FD16}" type="datetimeFigureOut">
               <a:rPr lang="ko-KR" altLang="en-US" smtClean="0"/>
-              <a:t>2025-06-13</a:t>
+              <a:t>2025-06-14</a:t>
             </a:fld>
             <a:endParaRPr lang="ko-KR" altLang="en-US"/>
           </a:p>
@@ -461,7 +461,7 @@
           <a:p>
             <a:fld id="{37207A8B-0000-4D20-A8A7-3FE7CFF1FD16}" type="datetimeFigureOut">
               <a:rPr lang="ko-KR" altLang="en-US" smtClean="0"/>
-              <a:t>2025-06-13</a:t>
+              <a:t>2025-06-14</a:t>
             </a:fld>
             <a:endParaRPr lang="ko-KR" altLang="en-US"/>
           </a:p>
@@ -669,7 +669,7 @@
           <a:p>
             <a:fld id="{37207A8B-0000-4D20-A8A7-3FE7CFF1FD16}" type="datetimeFigureOut">
               <a:rPr lang="ko-KR" altLang="en-US" smtClean="0"/>
-              <a:t>2025-06-13</a:t>
+              <a:t>2025-06-14</a:t>
             </a:fld>
             <a:endParaRPr lang="ko-KR" altLang="en-US"/>
           </a:p>
@@ -867,7 +867,7 @@
           <a:p>
             <a:fld id="{37207A8B-0000-4D20-A8A7-3FE7CFF1FD16}" type="datetimeFigureOut">
               <a:rPr lang="ko-KR" altLang="en-US" smtClean="0"/>
-              <a:t>2025-06-13</a:t>
+              <a:t>2025-06-14</a:t>
             </a:fld>
             <a:endParaRPr lang="ko-KR" altLang="en-US"/>
           </a:p>
@@ -1142,7 +1142,7 @@
           <a:p>
             <a:fld id="{37207A8B-0000-4D20-A8A7-3FE7CFF1FD16}" type="datetimeFigureOut">
               <a:rPr lang="ko-KR" altLang="en-US" smtClean="0"/>
-              <a:t>2025-06-13</a:t>
+              <a:t>2025-06-14</a:t>
             </a:fld>
             <a:endParaRPr lang="ko-KR" altLang="en-US"/>
           </a:p>
@@ -1407,7 +1407,7 @@
           <a:p>
             <a:fld id="{37207A8B-0000-4D20-A8A7-3FE7CFF1FD16}" type="datetimeFigureOut">
               <a:rPr lang="ko-KR" altLang="en-US" smtClean="0"/>
-              <a:t>2025-06-13</a:t>
+              <a:t>2025-06-14</a:t>
             </a:fld>
             <a:endParaRPr lang="ko-KR" altLang="en-US"/>
           </a:p>
@@ -1819,7 +1819,7 @@
           <a:p>
             <a:fld id="{37207A8B-0000-4D20-A8A7-3FE7CFF1FD16}" type="datetimeFigureOut">
               <a:rPr lang="ko-KR" altLang="en-US" smtClean="0"/>
-              <a:t>2025-06-13</a:t>
+              <a:t>2025-06-14</a:t>
             </a:fld>
             <a:endParaRPr lang="ko-KR" altLang="en-US"/>
           </a:p>
@@ -1960,7 +1960,7 @@
           <a:p>
             <a:fld id="{37207A8B-0000-4D20-A8A7-3FE7CFF1FD16}" type="datetimeFigureOut">
               <a:rPr lang="ko-KR" altLang="en-US" smtClean="0"/>
-              <a:t>2025-06-13</a:t>
+              <a:t>2025-06-14</a:t>
             </a:fld>
             <a:endParaRPr lang="ko-KR" altLang="en-US"/>
           </a:p>
@@ -2073,7 +2073,7 @@
           <a:p>
             <a:fld id="{37207A8B-0000-4D20-A8A7-3FE7CFF1FD16}" type="datetimeFigureOut">
               <a:rPr lang="ko-KR" altLang="en-US" smtClean="0"/>
-              <a:t>2025-06-13</a:t>
+              <a:t>2025-06-14</a:t>
             </a:fld>
             <a:endParaRPr lang="ko-KR" altLang="en-US"/>
           </a:p>
@@ -2384,7 +2384,7 @@
           <a:p>
             <a:fld id="{37207A8B-0000-4D20-A8A7-3FE7CFF1FD16}" type="datetimeFigureOut">
               <a:rPr lang="ko-KR" altLang="en-US" smtClean="0"/>
-              <a:t>2025-06-13</a:t>
+              <a:t>2025-06-14</a:t>
             </a:fld>
             <a:endParaRPr lang="ko-KR" altLang="en-US"/>
           </a:p>
@@ -2672,7 +2672,7 @@
           <a:p>
             <a:fld id="{37207A8B-0000-4D20-A8A7-3FE7CFF1FD16}" type="datetimeFigureOut">
               <a:rPr lang="ko-KR" altLang="en-US" smtClean="0"/>
-              <a:t>2025-06-13</a:t>
+              <a:t>2025-06-14</a:t>
             </a:fld>
             <a:endParaRPr lang="ko-KR" altLang="en-US"/>
           </a:p>
@@ -2913,7 +2913,7 @@
           <a:p>
             <a:fld id="{37207A8B-0000-4D20-A8A7-3FE7CFF1FD16}" type="datetimeFigureOut">
               <a:rPr lang="ko-KR" altLang="en-US" smtClean="0"/>
-              <a:t>2025-06-13</a:t>
+              <a:t>2025-06-14</a:t>
             </a:fld>
             <a:endParaRPr lang="ko-KR" altLang="en-US"/>
           </a:p>
@@ -20956,6 +20956,70 @@
           </a:extLst>
         </p:spPr>
       </p:pic>
+      <p:pic>
+        <p:nvPicPr>
+          <p:cNvPr id="3" name="Picture 2" descr="Crossed Sword Icon: Over 21,957 Royalty-Free Licensable Stock Illustrations  &amp; Drawings | Shutterstock">
+            <a:extLst>
+              <a:ext uri="{FF2B5EF4-FFF2-40B4-BE49-F238E27FC236}">
+                <a16:creationId xmlns:a16="http://schemas.microsoft.com/office/drawing/2014/main" id="{B992256A-5CD8-B5C4-B60B-044962ECD167}"/>
+              </a:ext>
+            </a:extLst>
+          </p:cNvPr>
+          <p:cNvPicPr>
+            <a:picLocks noChangeAspect="1" noChangeArrowheads="1"/>
+          </p:cNvPicPr>
+          <p:nvPr/>
+        </p:nvPicPr>
+        <p:blipFill rotWithShape="1">
+          <a:blip r:embed="rId6">
+            <a:extLst>
+              <a:ext uri="{BEBA8EAE-BF5A-486C-A8C5-ECC9F3942E4B}">
+                <a14:imgProps xmlns:a14="http://schemas.microsoft.com/office/drawing/2010/main">
+                  <a14:imgLayer r:embed="rId7">
+                    <a14:imgEffect>
+                      <a14:backgroundRemoval t="10000" b="90000" l="10000" r="90000">
+                        <a14:foregroundMark x1="59167" y1="37000" x2="60833" y2="35667"/>
+                        <a14:foregroundMark x1="45167" y1="58333" x2="45167" y2="58333"/>
+                        <a14:foregroundMark x1="70667" y1="67333" x2="70667" y2="67333"/>
+                        <a14:foregroundMark x1="30333" y1="68667" x2="30333" y2="68667"/>
+                      </a14:backgroundRemoval>
+                    </a14:imgEffect>
+                    <a14:imgEffect>
+                      <a14:brightnessContrast bright="100000"/>
+                    </a14:imgEffect>
+                  </a14:imgLayer>
+                </a14:imgProps>
+              </a:ext>
+              <a:ext uri="{28A0092B-C50C-407E-A947-70E740481C1C}">
+                <a14:useLocalDpi xmlns:a14="http://schemas.microsoft.com/office/drawing/2010/main" val="0"/>
+              </a:ext>
+            </a:extLst>
+          </a:blip>
+          <a:srcRect l="16285" t="17151" r="17129" b="17232"/>
+          <a:stretch>
+            <a:fillRect/>
+          </a:stretch>
+        </p:blipFill>
+        <p:spPr bwMode="auto">
+          <a:xfrm>
+            <a:off x="7555345" y="1958108"/>
+            <a:ext cx="3805382" cy="3749965"/>
+          </a:xfrm>
+          <a:prstGeom prst="rect">
+            <a:avLst/>
+          </a:prstGeom>
+          <a:noFill/>
+          <a:extLst>
+            <a:ext uri="{909E8E84-426E-40DD-AFC4-6F175D3DCCD1}">
+              <a14:hiddenFill xmlns:a14="http://schemas.microsoft.com/office/drawing/2010/main">
+                <a:solidFill>
+                  <a:srgbClr val="FFFFFF"/>
+                </a:solidFill>
+              </a14:hiddenFill>
+            </a:ext>
+          </a:extLst>
+        </p:spPr>
+      </p:pic>
     </p:spTree>
     <p:extLst>
       <p:ext uri="{BB962C8B-B14F-4D97-AF65-F5344CB8AC3E}">

--- a/junk/stage.pptx
+++ b/junk/stage.pptx
@@ -263,7 +263,7 @@
           <a:p>
             <a:fld id="{37207A8B-0000-4D20-A8A7-3FE7CFF1FD16}" type="datetimeFigureOut">
               <a:rPr lang="ko-KR" altLang="en-US" smtClean="0"/>
-              <a:t>2025-06-14</a:t>
+              <a:t>2025-06-15</a:t>
             </a:fld>
             <a:endParaRPr lang="ko-KR" altLang="en-US"/>
           </a:p>
@@ -461,7 +461,7 @@
           <a:p>
             <a:fld id="{37207A8B-0000-4D20-A8A7-3FE7CFF1FD16}" type="datetimeFigureOut">
               <a:rPr lang="ko-KR" altLang="en-US" smtClean="0"/>
-              <a:t>2025-06-14</a:t>
+              <a:t>2025-06-15</a:t>
             </a:fld>
             <a:endParaRPr lang="ko-KR" altLang="en-US"/>
           </a:p>
@@ -669,7 +669,7 @@
           <a:p>
             <a:fld id="{37207A8B-0000-4D20-A8A7-3FE7CFF1FD16}" type="datetimeFigureOut">
               <a:rPr lang="ko-KR" altLang="en-US" smtClean="0"/>
-              <a:t>2025-06-14</a:t>
+              <a:t>2025-06-15</a:t>
             </a:fld>
             <a:endParaRPr lang="ko-KR" altLang="en-US"/>
           </a:p>
@@ -867,7 +867,7 @@
           <a:p>
             <a:fld id="{37207A8B-0000-4D20-A8A7-3FE7CFF1FD16}" type="datetimeFigureOut">
               <a:rPr lang="ko-KR" altLang="en-US" smtClean="0"/>
-              <a:t>2025-06-14</a:t>
+              <a:t>2025-06-15</a:t>
             </a:fld>
             <a:endParaRPr lang="ko-KR" altLang="en-US"/>
           </a:p>
@@ -1142,7 +1142,7 @@
           <a:p>
             <a:fld id="{37207A8B-0000-4D20-A8A7-3FE7CFF1FD16}" type="datetimeFigureOut">
               <a:rPr lang="ko-KR" altLang="en-US" smtClean="0"/>
-              <a:t>2025-06-14</a:t>
+              <a:t>2025-06-15</a:t>
             </a:fld>
             <a:endParaRPr lang="ko-KR" altLang="en-US"/>
           </a:p>
@@ -1407,7 +1407,7 @@
           <a:p>
             <a:fld id="{37207A8B-0000-4D20-A8A7-3FE7CFF1FD16}" type="datetimeFigureOut">
               <a:rPr lang="ko-KR" altLang="en-US" smtClean="0"/>
-              <a:t>2025-06-14</a:t>
+              <a:t>2025-06-15</a:t>
             </a:fld>
             <a:endParaRPr lang="ko-KR" altLang="en-US"/>
           </a:p>
@@ -1819,7 +1819,7 @@
           <a:p>
             <a:fld id="{37207A8B-0000-4D20-A8A7-3FE7CFF1FD16}" type="datetimeFigureOut">
               <a:rPr lang="ko-KR" altLang="en-US" smtClean="0"/>
-              <a:t>2025-06-14</a:t>
+              <a:t>2025-06-15</a:t>
             </a:fld>
             <a:endParaRPr lang="ko-KR" altLang="en-US"/>
           </a:p>
@@ -1960,7 +1960,7 @@
           <a:p>
             <a:fld id="{37207A8B-0000-4D20-A8A7-3FE7CFF1FD16}" type="datetimeFigureOut">
               <a:rPr lang="ko-KR" altLang="en-US" smtClean="0"/>
-              <a:t>2025-06-14</a:t>
+              <a:t>2025-06-15</a:t>
             </a:fld>
             <a:endParaRPr lang="ko-KR" altLang="en-US"/>
           </a:p>
@@ -2073,7 +2073,7 @@
           <a:p>
             <a:fld id="{37207A8B-0000-4D20-A8A7-3FE7CFF1FD16}" type="datetimeFigureOut">
               <a:rPr lang="ko-KR" altLang="en-US" smtClean="0"/>
-              <a:t>2025-06-14</a:t>
+              <a:t>2025-06-15</a:t>
             </a:fld>
             <a:endParaRPr lang="ko-KR" altLang="en-US"/>
           </a:p>
@@ -2384,7 +2384,7 @@
           <a:p>
             <a:fld id="{37207A8B-0000-4D20-A8A7-3FE7CFF1FD16}" type="datetimeFigureOut">
               <a:rPr lang="ko-KR" altLang="en-US" smtClean="0"/>
-              <a:t>2025-06-14</a:t>
+              <a:t>2025-06-15</a:t>
             </a:fld>
             <a:endParaRPr lang="ko-KR" altLang="en-US"/>
           </a:p>
@@ -2672,7 +2672,7 @@
           <a:p>
             <a:fld id="{37207A8B-0000-4D20-A8A7-3FE7CFF1FD16}" type="datetimeFigureOut">
               <a:rPr lang="ko-KR" altLang="en-US" smtClean="0"/>
-              <a:t>2025-06-14</a:t>
+              <a:t>2025-06-15</a:t>
             </a:fld>
             <a:endParaRPr lang="ko-KR" altLang="en-US"/>
           </a:p>
@@ -2913,7 +2913,7 @@
           <a:p>
             <a:fld id="{37207A8B-0000-4D20-A8A7-3FE7CFF1FD16}" type="datetimeFigureOut">
               <a:rPr lang="ko-KR" altLang="en-US" smtClean="0"/>
-              <a:t>2025-06-14</a:t>
+              <a:t>2025-06-15</a:t>
             </a:fld>
             <a:endParaRPr lang="ko-KR" altLang="en-US"/>
           </a:p>
@@ -20796,12 +20796,12 @@
         </p:nvSpPr>
         <p:spPr>
           <a:xfrm>
-            <a:off x="5770485" y="1455938"/>
-            <a:ext cx="1642369" cy="1642369"/>
+            <a:off x="2313316" y="3902898"/>
+            <a:ext cx="2515385" cy="2515385"/>
           </a:xfrm>
           <a:prstGeom prst="donut">
             <a:avLst>
-              <a:gd name="adj" fmla="val 24009"/>
+              <a:gd name="adj" fmla="val 3318"/>
             </a:avLst>
           </a:prstGeom>
           <a:solidFill>
@@ -20938,7 +20938,7 @@
         </p:blipFill>
         <p:spPr bwMode="auto">
           <a:xfrm>
-            <a:off x="2370338" y="4425518"/>
+            <a:off x="6792193" y="479394"/>
             <a:ext cx="3657600" cy="976544"/>
           </a:xfrm>
           <a:prstGeom prst="rect">
@@ -21020,6 +21020,246 @@
           </a:extLst>
         </p:spPr>
       </p:pic>
+      <p:sp>
+        <p:nvSpPr>
+          <p:cNvPr id="8" name="원형: 비어 있음 7">
+            <a:extLst>
+              <a:ext uri="{FF2B5EF4-FFF2-40B4-BE49-F238E27FC236}">
+                <a16:creationId xmlns:a16="http://schemas.microsoft.com/office/drawing/2014/main" id="{4422ED48-50FB-4EF0-F36A-5164A6097C9F}"/>
+              </a:ext>
+            </a:extLst>
+          </p:cNvPr>
+          <p:cNvSpPr/>
+          <p:nvPr/>
+        </p:nvSpPr>
+        <p:spPr>
+          <a:xfrm>
+            <a:off x="2618250" y="4207832"/>
+            <a:ext cx="1905515" cy="1905515"/>
+          </a:xfrm>
+          <a:prstGeom prst="donut">
+            <a:avLst>
+              <a:gd name="adj" fmla="val 3318"/>
+            </a:avLst>
+          </a:prstGeom>
+          <a:solidFill>
+            <a:schemeClr val="bg1">
+              <a:lumMod val="95000"/>
+            </a:schemeClr>
+          </a:solidFill>
+          <a:ln>
+            <a:noFill/>
+          </a:ln>
+        </p:spPr>
+        <p:style>
+          <a:lnRef idx="2">
+            <a:schemeClr val="accent1">
+              <a:shade val="15000"/>
+            </a:schemeClr>
+          </a:lnRef>
+          <a:fillRef idx="1">
+            <a:schemeClr val="accent1"/>
+          </a:fillRef>
+          <a:effectRef idx="0">
+            <a:schemeClr val="accent1"/>
+          </a:effectRef>
+          <a:fontRef idx="minor">
+            <a:schemeClr val="lt1"/>
+          </a:fontRef>
+        </p:style>
+        <p:txBody>
+          <a:bodyPr rtlCol="0" anchor="ctr"/>
+          <a:lstStyle/>
+          <a:p>
+            <a:pPr algn="ctr"/>
+            <a:endParaRPr lang="ko-KR" altLang="en-US" dirty="0">
+              <a:solidFill>
+                <a:schemeClr val="tx1"/>
+              </a:solidFill>
+            </a:endParaRPr>
+          </a:p>
+        </p:txBody>
+      </p:sp>
+      <p:sp>
+        <p:nvSpPr>
+          <p:cNvPr id="9" name="원형: 비어 있음 8">
+            <a:extLst>
+              <a:ext uri="{FF2B5EF4-FFF2-40B4-BE49-F238E27FC236}">
+                <a16:creationId xmlns:a16="http://schemas.microsoft.com/office/drawing/2014/main" id="{E4B6D14B-92E6-F738-E7AE-CBF3EF2BE8B9}"/>
+              </a:ext>
+            </a:extLst>
+          </p:cNvPr>
+          <p:cNvSpPr/>
+          <p:nvPr/>
+        </p:nvSpPr>
+        <p:spPr>
+          <a:xfrm>
+            <a:off x="2898807" y="4488389"/>
+            <a:ext cx="1344399" cy="1344399"/>
+          </a:xfrm>
+          <a:prstGeom prst="donut">
+            <a:avLst>
+              <a:gd name="adj" fmla="val 3318"/>
+            </a:avLst>
+          </a:prstGeom>
+          <a:solidFill>
+            <a:schemeClr val="bg1">
+              <a:lumMod val="95000"/>
+            </a:schemeClr>
+          </a:solidFill>
+          <a:ln>
+            <a:noFill/>
+          </a:ln>
+        </p:spPr>
+        <p:style>
+          <a:lnRef idx="2">
+            <a:schemeClr val="accent1">
+              <a:shade val="15000"/>
+            </a:schemeClr>
+          </a:lnRef>
+          <a:fillRef idx="1">
+            <a:schemeClr val="accent1"/>
+          </a:fillRef>
+          <a:effectRef idx="0">
+            <a:schemeClr val="accent1"/>
+          </a:effectRef>
+          <a:fontRef idx="minor">
+            <a:schemeClr val="lt1"/>
+          </a:fontRef>
+        </p:style>
+        <p:txBody>
+          <a:bodyPr rtlCol="0" anchor="ctr"/>
+          <a:lstStyle/>
+          <a:p>
+            <a:pPr algn="ctr"/>
+            <a:endParaRPr lang="ko-KR" altLang="en-US" dirty="0">
+              <a:solidFill>
+                <a:schemeClr val="tx1"/>
+              </a:solidFill>
+            </a:endParaRPr>
+          </a:p>
+        </p:txBody>
+      </p:sp>
+      <p:sp>
+        <p:nvSpPr>
+          <p:cNvPr id="10" name="원형: 비어 있음 9">
+            <a:extLst>
+              <a:ext uri="{FF2B5EF4-FFF2-40B4-BE49-F238E27FC236}">
+                <a16:creationId xmlns:a16="http://schemas.microsoft.com/office/drawing/2014/main" id="{EF7435BA-6B34-C25A-A5A6-BF31CACF3313}"/>
+              </a:ext>
+            </a:extLst>
+          </p:cNvPr>
+          <p:cNvSpPr/>
+          <p:nvPr/>
+        </p:nvSpPr>
+        <p:spPr>
+          <a:xfrm>
+            <a:off x="3123492" y="4713074"/>
+            <a:ext cx="895027" cy="895027"/>
+          </a:xfrm>
+          <a:prstGeom prst="donut">
+            <a:avLst>
+              <a:gd name="adj" fmla="val 3318"/>
+            </a:avLst>
+          </a:prstGeom>
+          <a:solidFill>
+            <a:schemeClr val="bg1">
+              <a:lumMod val="95000"/>
+            </a:schemeClr>
+          </a:solidFill>
+          <a:ln>
+            <a:noFill/>
+          </a:ln>
+        </p:spPr>
+        <p:style>
+          <a:lnRef idx="2">
+            <a:schemeClr val="accent1">
+              <a:shade val="15000"/>
+            </a:schemeClr>
+          </a:lnRef>
+          <a:fillRef idx="1">
+            <a:schemeClr val="accent1"/>
+          </a:fillRef>
+          <a:effectRef idx="0">
+            <a:schemeClr val="accent1"/>
+          </a:effectRef>
+          <a:fontRef idx="minor">
+            <a:schemeClr val="lt1"/>
+          </a:fontRef>
+        </p:style>
+        <p:txBody>
+          <a:bodyPr rtlCol="0" anchor="ctr"/>
+          <a:lstStyle/>
+          <a:p>
+            <a:pPr algn="ctr"/>
+            <a:endParaRPr lang="ko-KR" altLang="en-US" dirty="0">
+              <a:solidFill>
+                <a:schemeClr val="tx1"/>
+              </a:solidFill>
+            </a:endParaRPr>
+          </a:p>
+        </p:txBody>
+      </p:sp>
+      <p:sp>
+        <p:nvSpPr>
+          <p:cNvPr id="11" name="원형: 비어 있음 10">
+            <a:extLst>
+              <a:ext uri="{FF2B5EF4-FFF2-40B4-BE49-F238E27FC236}">
+                <a16:creationId xmlns:a16="http://schemas.microsoft.com/office/drawing/2014/main" id="{C4810B16-9CCE-72B4-502C-BA116C3F9068}"/>
+              </a:ext>
+            </a:extLst>
+          </p:cNvPr>
+          <p:cNvSpPr/>
+          <p:nvPr/>
+        </p:nvSpPr>
+        <p:spPr>
+          <a:xfrm>
+            <a:off x="3303752" y="4893334"/>
+            <a:ext cx="534506" cy="534506"/>
+          </a:xfrm>
+          <a:prstGeom prst="donut">
+            <a:avLst>
+              <a:gd name="adj" fmla="val 3318"/>
+            </a:avLst>
+          </a:prstGeom>
+          <a:solidFill>
+            <a:schemeClr val="bg1">
+              <a:lumMod val="95000"/>
+            </a:schemeClr>
+          </a:solidFill>
+          <a:ln>
+            <a:noFill/>
+          </a:ln>
+        </p:spPr>
+        <p:style>
+          <a:lnRef idx="2">
+            <a:schemeClr val="accent1">
+              <a:shade val="15000"/>
+            </a:schemeClr>
+          </a:lnRef>
+          <a:fillRef idx="1">
+            <a:schemeClr val="accent1"/>
+          </a:fillRef>
+          <a:effectRef idx="0">
+            <a:schemeClr val="accent1"/>
+          </a:effectRef>
+          <a:fontRef idx="minor">
+            <a:schemeClr val="lt1"/>
+          </a:fontRef>
+        </p:style>
+        <p:txBody>
+          <a:bodyPr rtlCol="0" anchor="ctr"/>
+          <a:lstStyle/>
+          <a:p>
+            <a:pPr algn="ctr"/>
+            <a:endParaRPr lang="ko-KR" altLang="en-US" dirty="0">
+              <a:solidFill>
+                <a:schemeClr val="tx1"/>
+              </a:solidFill>
+            </a:endParaRPr>
+          </a:p>
+        </p:txBody>
+      </p:sp>
     </p:spTree>
     <p:extLst>
       <p:ext uri="{BB962C8B-B14F-4D97-AF65-F5344CB8AC3E}">

--- a/junk/stage.pptx
+++ b/junk/stage.pptx
@@ -10,6 +10,7 @@
     <p:sldId id="258" r:id="rId4"/>
     <p:sldId id="259" r:id="rId5"/>
     <p:sldId id="260" r:id="rId6"/>
+    <p:sldId id="261" r:id="rId7"/>
   </p:sldIdLst>
   <p:sldSz cx="12192000" cy="6858000"/>
   <p:notesSz cx="6858000" cy="9144000"/>
@@ -263,7 +264,7 @@
           <a:p>
             <a:fld id="{37207A8B-0000-4D20-A8A7-3FE7CFF1FD16}" type="datetimeFigureOut">
               <a:rPr lang="ko-KR" altLang="en-US" smtClean="0"/>
-              <a:t>2025-06-15</a:t>
+              <a:t>2025-06-16</a:t>
             </a:fld>
             <a:endParaRPr lang="ko-KR" altLang="en-US"/>
           </a:p>
@@ -461,7 +462,7 @@
           <a:p>
             <a:fld id="{37207A8B-0000-4D20-A8A7-3FE7CFF1FD16}" type="datetimeFigureOut">
               <a:rPr lang="ko-KR" altLang="en-US" smtClean="0"/>
-              <a:t>2025-06-15</a:t>
+              <a:t>2025-06-16</a:t>
             </a:fld>
             <a:endParaRPr lang="ko-KR" altLang="en-US"/>
           </a:p>
@@ -669,7 +670,7 @@
           <a:p>
             <a:fld id="{37207A8B-0000-4D20-A8A7-3FE7CFF1FD16}" type="datetimeFigureOut">
               <a:rPr lang="ko-KR" altLang="en-US" smtClean="0"/>
-              <a:t>2025-06-15</a:t>
+              <a:t>2025-06-16</a:t>
             </a:fld>
             <a:endParaRPr lang="ko-KR" altLang="en-US"/>
           </a:p>
@@ -867,7 +868,7 @@
           <a:p>
             <a:fld id="{37207A8B-0000-4D20-A8A7-3FE7CFF1FD16}" type="datetimeFigureOut">
               <a:rPr lang="ko-KR" altLang="en-US" smtClean="0"/>
-              <a:t>2025-06-15</a:t>
+              <a:t>2025-06-16</a:t>
             </a:fld>
             <a:endParaRPr lang="ko-KR" altLang="en-US"/>
           </a:p>
@@ -1142,7 +1143,7 @@
           <a:p>
             <a:fld id="{37207A8B-0000-4D20-A8A7-3FE7CFF1FD16}" type="datetimeFigureOut">
               <a:rPr lang="ko-KR" altLang="en-US" smtClean="0"/>
-              <a:t>2025-06-15</a:t>
+              <a:t>2025-06-16</a:t>
             </a:fld>
             <a:endParaRPr lang="ko-KR" altLang="en-US"/>
           </a:p>
@@ -1407,7 +1408,7 @@
           <a:p>
             <a:fld id="{37207A8B-0000-4D20-A8A7-3FE7CFF1FD16}" type="datetimeFigureOut">
               <a:rPr lang="ko-KR" altLang="en-US" smtClean="0"/>
-              <a:t>2025-06-15</a:t>
+              <a:t>2025-06-16</a:t>
             </a:fld>
             <a:endParaRPr lang="ko-KR" altLang="en-US"/>
           </a:p>
@@ -1819,7 +1820,7 @@
           <a:p>
             <a:fld id="{37207A8B-0000-4D20-A8A7-3FE7CFF1FD16}" type="datetimeFigureOut">
               <a:rPr lang="ko-KR" altLang="en-US" smtClean="0"/>
-              <a:t>2025-06-15</a:t>
+              <a:t>2025-06-16</a:t>
             </a:fld>
             <a:endParaRPr lang="ko-KR" altLang="en-US"/>
           </a:p>
@@ -1960,7 +1961,7 @@
           <a:p>
             <a:fld id="{37207A8B-0000-4D20-A8A7-3FE7CFF1FD16}" type="datetimeFigureOut">
               <a:rPr lang="ko-KR" altLang="en-US" smtClean="0"/>
-              <a:t>2025-06-15</a:t>
+              <a:t>2025-06-16</a:t>
             </a:fld>
             <a:endParaRPr lang="ko-KR" altLang="en-US"/>
           </a:p>
@@ -2073,7 +2074,7 @@
           <a:p>
             <a:fld id="{37207A8B-0000-4D20-A8A7-3FE7CFF1FD16}" type="datetimeFigureOut">
               <a:rPr lang="ko-KR" altLang="en-US" smtClean="0"/>
-              <a:t>2025-06-15</a:t>
+              <a:t>2025-06-16</a:t>
             </a:fld>
             <a:endParaRPr lang="ko-KR" altLang="en-US"/>
           </a:p>
@@ -2384,7 +2385,7 @@
           <a:p>
             <a:fld id="{37207A8B-0000-4D20-A8A7-3FE7CFF1FD16}" type="datetimeFigureOut">
               <a:rPr lang="ko-KR" altLang="en-US" smtClean="0"/>
-              <a:t>2025-06-15</a:t>
+              <a:t>2025-06-16</a:t>
             </a:fld>
             <a:endParaRPr lang="ko-KR" altLang="en-US"/>
           </a:p>
@@ -2672,7 +2673,7 @@
           <a:p>
             <a:fld id="{37207A8B-0000-4D20-A8A7-3FE7CFF1FD16}" type="datetimeFigureOut">
               <a:rPr lang="ko-KR" altLang="en-US" smtClean="0"/>
-              <a:t>2025-06-15</a:t>
+              <a:t>2025-06-16</a:t>
             </a:fld>
             <a:endParaRPr lang="ko-KR" altLang="en-US"/>
           </a:p>
@@ -2913,7 +2914,7 @@
           <a:p>
             <a:fld id="{37207A8B-0000-4D20-A8A7-3FE7CFF1FD16}" type="datetimeFigureOut">
               <a:rPr lang="ko-KR" altLang="en-US" smtClean="0"/>
-              <a:t>2025-06-15</a:t>
+              <a:t>2025-06-16</a:t>
             </a:fld>
             <a:endParaRPr lang="ko-KR" altLang="en-US"/>
           </a:p>
@@ -12501,7 +12502,7 @@
                     <a:lstStyle/>
                     <a:p>
                       <a:pPr latinLnBrk="1"/>
-                      <a:endParaRPr lang="ko-KR" altLang="en-US" sz="500"/>
+                      <a:endParaRPr lang="ko-KR" altLang="en-US" sz="500" dirty="0"/>
                     </a:p>
                   </a:txBody>
                   <a:tcPr>
@@ -21273,6 +21274,258 @@
 </p:sld>
 </file>
 
+<file path=ppt/slides/slide6.xml><?xml version="1.0" encoding="utf-8"?>
+<p:sld xmlns:a="http://schemas.openxmlformats.org/drawingml/2006/main" xmlns:r="http://schemas.openxmlformats.org/officeDocument/2006/relationships" xmlns:p="http://schemas.openxmlformats.org/presentationml/2006/main">
+  <p:cSld>
+    <p:bg>
+      <p:bgPr>
+        <a:solidFill>
+          <a:schemeClr val="tx1"/>
+        </a:solidFill>
+        <a:effectLst/>
+      </p:bgPr>
+    </p:bg>
+    <p:spTree>
+      <p:nvGrpSpPr>
+        <p:cNvPr id="1" name=""/>
+        <p:cNvGrpSpPr/>
+        <p:nvPr/>
+      </p:nvGrpSpPr>
+      <p:grpSpPr>
+        <a:xfrm>
+          <a:off x="0" y="0"/>
+          <a:ext cx="0" cy="0"/>
+          <a:chOff x="0" y="0"/>
+          <a:chExt cx="0" cy="0"/>
+        </a:xfrm>
+      </p:grpSpPr>
+      <p:pic>
+        <p:nvPicPr>
+          <p:cNvPr id="4" name="그림 3">
+            <a:extLst>
+              <a:ext uri="{FF2B5EF4-FFF2-40B4-BE49-F238E27FC236}">
+                <a16:creationId xmlns:a16="http://schemas.microsoft.com/office/drawing/2014/main" id="{534753C2-E4A4-1CED-5587-EC0488248AFE}"/>
+              </a:ext>
+            </a:extLst>
+          </p:cNvPr>
+          <p:cNvPicPr>
+            <a:picLocks noChangeAspect="1"/>
+          </p:cNvPicPr>
+          <p:nvPr/>
+        </p:nvPicPr>
+        <p:blipFill>
+          <a:blip r:embed="rId2">
+            <a:extLst>
+              <a:ext uri="{BEBA8EAE-BF5A-486C-A8C5-ECC9F3942E4B}">
+                <a14:imgProps xmlns:a14="http://schemas.microsoft.com/office/drawing/2010/main">
+                  <a14:imgLayer r:embed="rId3">
+                    <a14:imgEffect>
+                      <a14:brightnessContrast bright="100000"/>
+                    </a14:imgEffect>
+                  </a14:imgLayer>
+                </a14:imgProps>
+              </a:ext>
+            </a:extLst>
+          </a:blip>
+          <a:stretch>
+            <a:fillRect/>
+          </a:stretch>
+        </p:blipFill>
+        <p:spPr>
+          <a:xfrm>
+            <a:off x="5143500" y="2476500"/>
+            <a:ext cx="1905000" cy="1905000"/>
+          </a:xfrm>
+          <a:prstGeom prst="rect">
+            <a:avLst/>
+          </a:prstGeom>
+        </p:spPr>
+      </p:pic>
+      <p:pic>
+        <p:nvPicPr>
+          <p:cNvPr id="3" name="그림 2" descr="로고, 클립아트, 그래픽, 상징이(가) 표시된 사진&#10;&#10;AI 생성 콘텐츠는 정확하지 않을 수 있습니다.">
+            <a:extLst>
+              <a:ext uri="{FF2B5EF4-FFF2-40B4-BE49-F238E27FC236}">
+                <a16:creationId xmlns:a16="http://schemas.microsoft.com/office/drawing/2014/main" id="{0DBF7203-B776-185F-F0D8-66FDC82F3975}"/>
+              </a:ext>
+            </a:extLst>
+          </p:cNvPr>
+          <p:cNvPicPr>
+            <a:picLocks noChangeAspect="1"/>
+          </p:cNvPicPr>
+          <p:nvPr/>
+        </p:nvPicPr>
+        <p:blipFill>
+          <a:blip r:embed="rId4">
+            <a:extLst>
+              <a:ext uri="{BEBA8EAE-BF5A-486C-A8C5-ECC9F3942E4B}">
+                <a14:imgProps xmlns:a14="http://schemas.microsoft.com/office/drawing/2010/main">
+                  <a14:imgLayer r:embed="rId5">
+                    <a14:imgEffect>
+                      <a14:backgroundRemoval t="7422" b="91602" l="5273" r="94336">
+                        <a14:foregroundMark x1="90039" y1="8594" x2="91406" y2="9375"/>
+                        <a14:foregroundMark x1="94531" y1="7422" x2="94531" y2="7422"/>
+                        <a14:foregroundMark x1="8984" y1="56641" x2="9570" y2="60547"/>
+                        <a14:foregroundMark x1="9180" y1="86719" x2="6250" y2="88672"/>
+                        <a14:foregroundMark x1="8008" y1="89648" x2="5273" y2="91602"/>
+                        <a14:foregroundMark x1="44141" y1="59961" x2="57617" y2="55859"/>
+                        <a14:foregroundMark x1="42188" y1="70898" x2="49023" y2="69922"/>
+                        <a14:foregroundMark x1="36914" y1="80664" x2="41211" y2="82617"/>
+                        <a14:foregroundMark x1="27148" y1="88477" x2="31445" y2="90430"/>
+                      </a14:backgroundRemoval>
+                    </a14:imgEffect>
+                  </a14:imgLayer>
+                </a14:imgProps>
+              </a:ext>
+              <a:ext uri="{28A0092B-C50C-407E-A947-70E740481C1C}">
+                <a14:useLocalDpi xmlns:a14="http://schemas.microsoft.com/office/drawing/2010/main" val="0"/>
+              </a:ext>
+            </a:extLst>
+          </a:blip>
+          <a:stretch>
+            <a:fillRect/>
+          </a:stretch>
+        </p:blipFill>
+        <p:spPr>
+          <a:xfrm>
+            <a:off x="3596054" y="2083191"/>
+            <a:ext cx="1547446" cy="1547446"/>
+          </a:xfrm>
+          <a:prstGeom prst="rect">
+            <a:avLst/>
+          </a:prstGeom>
+        </p:spPr>
+      </p:pic>
+      <p:pic>
+        <p:nvPicPr>
+          <p:cNvPr id="9" name="그림 8" descr="상징이(가) 표시된 사진&#10;&#10;AI 생성 콘텐츠는 정확하지 않을 수 있습니다.">
+            <a:extLst>
+              <a:ext uri="{FF2B5EF4-FFF2-40B4-BE49-F238E27FC236}">
+                <a16:creationId xmlns:a16="http://schemas.microsoft.com/office/drawing/2014/main" id="{E909D035-19A8-A8F4-690D-9A312A789171}"/>
+              </a:ext>
+            </a:extLst>
+          </p:cNvPr>
+          <p:cNvPicPr>
+            <a:picLocks noChangeAspect="1"/>
+          </p:cNvPicPr>
+          <p:nvPr/>
+        </p:nvPicPr>
+        <p:blipFill>
+          <a:blip r:embed="rId6">
+            <a:extLst>
+              <a:ext uri="{28A0092B-C50C-407E-A947-70E740481C1C}">
+                <a14:useLocalDpi xmlns:a14="http://schemas.microsoft.com/office/drawing/2010/main" val="0"/>
+              </a:ext>
+            </a:extLst>
+          </a:blip>
+          <a:srcRect t="3855" b="59729"/>
+          <a:stretch>
+            <a:fillRect/>
+          </a:stretch>
+        </p:blipFill>
+        <p:spPr>
+          <a:xfrm>
+            <a:off x="7144761" y="1220079"/>
+            <a:ext cx="4285239" cy="1726223"/>
+          </a:xfrm>
+          <a:prstGeom prst="rect">
+            <a:avLst/>
+          </a:prstGeom>
+        </p:spPr>
+      </p:pic>
+      <p:pic>
+        <p:nvPicPr>
+          <p:cNvPr id="11" name="그림 10">
+            <a:extLst>
+              <a:ext uri="{FF2B5EF4-FFF2-40B4-BE49-F238E27FC236}">
+                <a16:creationId xmlns:a16="http://schemas.microsoft.com/office/drawing/2014/main" id="{7339381C-8F80-4326-78E4-120D49D90853}"/>
+              </a:ext>
+            </a:extLst>
+          </p:cNvPr>
+          <p:cNvPicPr>
+            <a:picLocks noChangeAspect="1"/>
+          </p:cNvPicPr>
+          <p:nvPr/>
+        </p:nvPicPr>
+        <p:blipFill>
+          <a:blip r:embed="rId7">
+            <a:extLst>
+              <a:ext uri="{BEBA8EAE-BF5A-486C-A8C5-ECC9F3942E4B}">
+                <a14:imgProps xmlns:a14="http://schemas.microsoft.com/office/drawing/2010/main">
+                  <a14:imgLayer r:embed="rId8">
+                    <a14:imgEffect>
+                      <a14:backgroundRemoval t="6285" b="91807" l="7477" r="92991">
+                        <a14:foregroundMark x1="10280" y1="49719" x2="7593" y2="49046"/>
+                        <a14:foregroundMark x1="53271" y1="89450" x2="51636" y2="92031"/>
+                        <a14:foregroundMark x1="89136" y1="69473" x2="90304" y2="67565"/>
+                        <a14:foregroundMark x1="93107" y1="64646" x2="93107" y2="64646"/>
+                        <a14:foregroundMark x1="44393" y1="22222" x2="46612" y2="26712"/>
+                        <a14:foregroundMark x1="73364" y1="40067" x2="74065" y2="42312"/>
+                        <a14:foregroundMark x1="66355" y1="13019" x2="68692" y2="14478"/>
+                        <a14:foregroundMark x1="68341" y1="7407" x2="67874" y2="6285"/>
+                        <a14:foregroundMark x1="35864" y1="43098" x2="35864" y2="41190"/>
+                        <a14:foregroundMark x1="49416" y1="58698" x2="49416" y2="58698"/>
+                        <a14:backgroundMark x1="30491" y1="61616" x2="30491" y2="61616"/>
+                        <a14:backgroundMark x1="32827" y1="59035" x2="30140" y2="61616"/>
+                        <a14:backgroundMark x1="32009" y1="57912" x2="28621" y2="63524"/>
+                        <a14:backgroundMark x1="29322" y1="57127" x2="37500" y2="63075"/>
+                        <a14:backgroundMark x1="30958" y1="54209" x2="28972" y2="54994"/>
+                        <a14:backgroundMark x1="35164" y1="56117" x2="25467" y2="66442"/>
+                        <a14:backgroundMark x1="33645" y1="60943" x2="30958" y2="65769"/>
+                        <a14:backgroundMark x1="34346" y1="62738" x2="30958" y2="64646"/>
+                        <a14:backgroundMark x1="32477" y1="62738" x2="33645" y2="65320"/>
+                        <a14:backgroundMark x1="33645" y1="57576" x2="26285" y2="61953"/>
+                        <a14:backgroundMark x1="33645" y1="59371" x2="30140" y2="60943"/>
+                        <a14:backgroundMark x1="32009" y1="56790" x2="25818" y2="60943"/>
+                        <a14:backgroundMark x1="29790" y1="59035" x2="26986" y2="61616"/>
+                        <a14:backgroundMark x1="30958" y1="57912" x2="23131" y2="60494"/>
+                        <a14:backgroundMark x1="33178" y1="57576" x2="21963" y2="60494"/>
+                        <a14:backgroundMark x1="28972" y1="58249" x2="19743" y2="59035"/>
+                        <a14:backgroundMark x1="32827" y1="57127" x2="39019" y2="56453"/>
+                        <a14:backgroundMark x1="35514" y1="59371" x2="31659" y2="57912"/>
+                        <a14:backgroundMark x1="32477" y1="56117" x2="21612" y2="60494"/>
+                        <a14:backgroundMark x1="32009" y1="58249" x2="20444" y2="59820"/>
+                        <a14:backgroundMark x1="31659" y1="59035" x2="18107" y2="53086"/>
+                        <a14:backgroundMark x1="37500" y1="60943" x2="38201" y2="68350"/>
+                        <a14:backgroundMark x1="36332" y1="62402" x2="34346" y2="67228"/>
+                      </a14:backgroundRemoval>
+                    </a14:imgEffect>
+                    <a14:imgEffect>
+                      <a14:brightnessContrast bright="100000"/>
+                    </a14:imgEffect>
+                  </a14:imgLayer>
+                </a14:imgProps>
+              </a:ext>
+            </a:extLst>
+          </a:blip>
+          <a:srcRect l="28583" t="3328" r="11115" b="37254"/>
+          <a:stretch>
+            <a:fillRect/>
+          </a:stretch>
+        </p:blipFill>
+        <p:spPr>
+          <a:xfrm>
+            <a:off x="1468582" y="3796145"/>
+            <a:ext cx="1440874" cy="1477819"/>
+          </a:xfrm>
+          <a:prstGeom prst="rect">
+            <a:avLst/>
+          </a:prstGeom>
+        </p:spPr>
+      </p:pic>
+    </p:spTree>
+    <p:extLst>
+      <p:ext uri="{BB962C8B-B14F-4D97-AF65-F5344CB8AC3E}">
+        <p14:creationId xmlns:p14="http://schemas.microsoft.com/office/powerpoint/2010/main" val="14616931"/>
+      </p:ext>
+    </p:extLst>
+  </p:cSld>
+  <p:clrMapOvr>
+    <a:masterClrMapping/>
+  </p:clrMapOvr>
+</p:sld>
+</file>
+
 <file path=ppt/theme/theme1.xml><?xml version="1.0" encoding="utf-8"?>
 <a:theme xmlns:a="http://schemas.openxmlformats.org/drawingml/2006/main" name="Office 테마">
   <a:themeElements>
